--- a/topic04-functions-and-lambda-calculus/unit-04a-lectures/wip/talk-2/b-lambda-calculus.pptx
+++ b/topic04-functions-and-lambda-calculus/unit-04a-lectures/wip/talk-2/b-lambda-calculus.pptx
@@ -5,7 +5,7 @@
     <p:sldMasterId id="2147483666" r:id="rId1"/>
   </p:sldMasterIdLst>
   <p:notesMasterIdLst>
-    <p:notesMasterId r:id="rId19"/>
+    <p:notesMasterId r:id="rId23"/>
   </p:notesMasterIdLst>
   <p:sldIdLst>
     <p:sldId id="304" r:id="rId2"/>
@@ -24,7 +24,11 @@
     <p:sldId id="282" r:id="rId15"/>
     <p:sldId id="284" r:id="rId16"/>
     <p:sldId id="287" r:id="rId17"/>
-    <p:sldId id="343" r:id="rId18"/>
+    <p:sldId id="349" r:id="rId18"/>
+    <p:sldId id="350" r:id="rId19"/>
+    <p:sldId id="351" r:id="rId20"/>
+    <p:sldId id="352" r:id="rId21"/>
+    <p:sldId id="343" r:id="rId22"/>
   </p:sldIdLst>
   <p:sldSz cx="4610100" cy="3460750"/>
   <p:notesSz cx="4610100" cy="3460750"/>
@@ -224,7 +228,7 @@
           <a:p>
             <a:fld id="{8029FFF4-1735-2D4F-B84F-F6C1BAB36A7E}" type="datetimeFigureOut">
               <a:rPr lang="en-US" smtClean="0"/>
-              <a:t>1/27/26</a:t>
+              <a:t>1/29/26</a:t>
             </a:fld>
             <a:endParaRPr lang="en-US"/>
           </a:p>
@@ -861,7 +865,7 @@
           <a:p>
             <a:fld id="{1D8BD707-D9CF-40AE-B4C6-C98DA3205C09}" type="datetimeFigureOut">
               <a:rPr lang="en-US" smtClean="0"/>
-              <a:t>1/27/26</a:t>
+              <a:t>1/29/26</a:t>
             </a:fld>
             <a:endParaRPr lang="en-US"/>
           </a:p>
@@ -1293,7 +1297,7 @@
           <a:p>
             <a:fld id="{1D8BD707-D9CF-40AE-B4C6-C98DA3205C09}" type="datetimeFigureOut">
               <a:rPr lang="en-US" smtClean="0"/>
-              <a:t>1/27/26</a:t>
+              <a:t>1/29/26</a:t>
             </a:fld>
             <a:endParaRPr lang="en-US"/>
           </a:p>
@@ -1642,7 +1646,7 @@
           <a:p>
             <a:fld id="{1D8BD707-D9CF-40AE-B4C6-C98DA3205C09}" type="datetimeFigureOut">
               <a:rPr lang="en-US" smtClean="0"/>
-              <a:t>1/27/26</a:t>
+              <a:t>1/29/26</a:t>
             </a:fld>
             <a:endParaRPr lang="en-US"/>
           </a:p>
@@ -2060,7 +2064,7 @@
           <a:p>
             <a:fld id="{1D8BD707-D9CF-40AE-B4C6-C98DA3205C09}" type="datetimeFigureOut">
               <a:rPr lang="en-US" smtClean="0"/>
-              <a:t>1/27/26</a:t>
+              <a:t>1/29/26</a:t>
             </a:fld>
             <a:endParaRPr lang="en-US"/>
           </a:p>
@@ -2641,7 +2645,7 @@
           <a:p>
             <a:fld id="{1D8BD707-D9CF-40AE-B4C6-C98DA3205C09}" type="datetimeFigureOut">
               <a:rPr lang="en-US" smtClean="0"/>
-              <a:t>1/27/26</a:t>
+              <a:t>1/29/26</a:t>
             </a:fld>
             <a:endParaRPr lang="en-US"/>
           </a:p>
@@ -3335,7 +3339,7 @@
           <a:p>
             <a:fld id="{1D8BD707-D9CF-40AE-B4C6-C98DA3205C09}" type="datetimeFigureOut">
               <a:rPr lang="en-US" smtClean="0"/>
-              <a:t>1/27/26</a:t>
+              <a:t>1/29/26</a:t>
             </a:fld>
             <a:endParaRPr lang="en-US"/>
           </a:p>
@@ -4261,7 +4265,7 @@
           <a:p>
             <a:fld id="{1D8BD707-D9CF-40AE-B4C6-C98DA3205C09}" type="datetimeFigureOut">
               <a:rPr lang="en-US" smtClean="0"/>
-              <a:t>1/27/26</a:t>
+              <a:t>1/29/26</a:t>
             </a:fld>
             <a:endParaRPr lang="en-US"/>
           </a:p>
@@ -4592,7 +4596,7 @@
           <a:p>
             <a:fld id="{1D8BD707-D9CF-40AE-B4C6-C98DA3205C09}" type="datetimeFigureOut">
               <a:rPr lang="en-US" smtClean="0"/>
-              <a:t>1/27/26</a:t>
+              <a:t>1/29/26</a:t>
             </a:fld>
             <a:endParaRPr lang="en-US"/>
           </a:p>
@@ -4871,7 +4875,7 @@
           <a:p>
             <a:fld id="{1D8BD707-D9CF-40AE-B4C6-C98DA3205C09}" type="datetimeFigureOut">
               <a:rPr lang="en-US" smtClean="0"/>
-              <a:t>1/27/26</a:t>
+              <a:t>1/29/26</a:t>
             </a:fld>
             <a:endParaRPr lang="en-US"/>
           </a:p>
@@ -5097,7 +5101,7 @@
           <a:p>
             <a:fld id="{1D8BD707-D9CF-40AE-B4C6-C98DA3205C09}" type="datetimeFigureOut">
               <a:rPr lang="en-US"/>
-              <a:t>1/27/26</a:t>
+              <a:t>1/29/26</a:t>
             </a:fld>
             <a:endParaRPr lang="en-US"/>
           </a:p>
@@ -5423,7 +5427,7 @@
           <a:p>
             <a:fld id="{1D8BD707-D9CF-40AE-B4C6-C98DA3205C09}" type="datetimeFigureOut">
               <a:rPr lang="en-US" smtClean="0"/>
-              <a:t>1/27/26</a:t>
+              <a:t>1/29/26</a:t>
             </a:fld>
             <a:endParaRPr lang="en-US"/>
           </a:p>
@@ -5830,7 +5834,7 @@
           <a:p>
             <a:fld id="{1D8BD707-D9CF-40AE-B4C6-C98DA3205C09}" type="datetimeFigureOut">
               <a:rPr lang="en-US" smtClean="0"/>
-              <a:t>1/27/26</a:t>
+              <a:t>1/29/26</a:t>
             </a:fld>
             <a:endParaRPr lang="en-US"/>
           </a:p>
@@ -6229,7 +6233,7 @@
           <a:p>
             <a:fld id="{1D8BD707-D9CF-40AE-B4C6-C98DA3205C09}" type="datetimeFigureOut">
               <a:rPr lang="en-US" smtClean="0"/>
-              <a:t>1/27/26</a:t>
+              <a:t>1/29/26</a:t>
             </a:fld>
             <a:endParaRPr lang="en-US"/>
           </a:p>
@@ -6748,7 +6752,7 @@
           <a:p>
             <a:fld id="{1D8BD707-D9CF-40AE-B4C6-C98DA3205C09}" type="datetimeFigureOut">
               <a:rPr lang="en-US" smtClean="0"/>
-              <a:t>1/27/26</a:t>
+              <a:t>1/29/26</a:t>
             </a:fld>
             <a:endParaRPr lang="en-US"/>
           </a:p>
@@ -7032,7 +7036,7 @@
           <a:p>
             <a:fld id="{1D8BD707-D9CF-40AE-B4C6-C98DA3205C09}" type="datetimeFigureOut">
               <a:rPr lang="en-US" smtClean="0"/>
-              <a:t>1/27/26</a:t>
+              <a:t>1/29/26</a:t>
             </a:fld>
             <a:endParaRPr lang="en-US"/>
           </a:p>
@@ -7201,7 +7205,7 @@
           <a:p>
             <a:fld id="{1D8BD707-D9CF-40AE-B4C6-C98DA3205C09}" type="datetimeFigureOut">
               <a:rPr lang="en-US" smtClean="0"/>
-              <a:t>1/27/26</a:t>
+              <a:t>1/29/26</a:t>
             </a:fld>
             <a:endParaRPr lang="en-US"/>
           </a:p>
@@ -7604,7 +7608,7 @@
           <a:p>
             <a:fld id="{1D8BD707-D9CF-40AE-B4C6-C98DA3205C09}" type="datetimeFigureOut">
               <a:rPr lang="en-US" smtClean="0"/>
-              <a:t>1/27/26</a:t>
+              <a:t>1/29/26</a:t>
             </a:fld>
             <a:endParaRPr lang="en-US"/>
           </a:p>
@@ -8026,7 +8030,7 @@
           <a:p>
             <a:fld id="{1D8BD707-D9CF-40AE-B4C6-C98DA3205C09}" type="datetimeFigureOut">
               <a:rPr lang="en-US" smtClean="0"/>
-              <a:t>1/27/26</a:t>
+              <a:t>1/29/26</a:t>
             </a:fld>
             <a:endParaRPr lang="en-US"/>
           </a:p>
@@ -8141,7 +8145,7 @@
           </a:prstGeom>
           <a:extLst>
             <a:ext uri="{909E8E84-426E-40dd-AFC4-6F175D3DCCD1}">
-              <a14:hiddenFill xmlns="" xmlns:a14="http://schemas.microsoft.com/office/drawing/2010/main">
+              <a14:hiddenFill xmlns:a14="http://schemas.microsoft.com/office/drawing/2010/main" xmlns="">
                 <a:solidFill>
                   <a:srgbClr val="FFFFFF"/>
                 </a:solidFill>
@@ -8280,7 +8284,7 @@
           <a:p>
             <a:fld id="{1D8BD707-D9CF-40AE-B4C6-C98DA3205C09}" type="datetimeFigureOut">
               <a:rPr lang="en-US" smtClean="0"/>
-              <a:t>1/27/26</a:t>
+              <a:t>1/29/26</a:t>
             </a:fld>
             <a:endParaRPr lang="en-US"/>
           </a:p>
@@ -8829,14 +8833,14 @@
           </a:xfrm>
           <a:extLst>
             <a:ext uri="{909E8E84-426E-40dd-AFC4-6F175D3DCCD1}">
-              <a14:hiddenFill xmlns:a14="http://schemas.microsoft.com/office/drawing/2010/main" xmlns="">
+              <a14:hiddenFill xmlns="" xmlns:a14="http://schemas.microsoft.com/office/drawing/2010/main">
                 <a:solidFill>
                   <a:srgbClr val="FFFFFF"/>
                 </a:solidFill>
               </a14:hiddenFill>
             </a:ext>
             <a:ext uri="{91240B29-F687-4f45-9708-019B960494DF}">
-              <a14:hiddenLine xmlns:a14="http://schemas.microsoft.com/office/drawing/2010/main" xmlns="" w="9525">
+              <a14:hiddenLine xmlns="" xmlns:a14="http://schemas.microsoft.com/office/drawing/2010/main" w="9525">
                 <a:solidFill>
                   <a:srgbClr val="000000"/>
                 </a:solidFill>
@@ -9138,14 +9142,14 @@
           </a:xfrm>
           <a:extLst>
             <a:ext uri="{909E8E84-426E-40dd-AFC4-6F175D3DCCD1}">
-              <a14:hiddenFill xmlns:a14="http://schemas.microsoft.com/office/drawing/2010/main" xmlns="">
+              <a14:hiddenFill xmlns="" xmlns:a14="http://schemas.microsoft.com/office/drawing/2010/main">
                 <a:solidFill>
                   <a:srgbClr val="FFFFFF"/>
                 </a:solidFill>
               </a14:hiddenFill>
             </a:ext>
             <a:ext uri="{91240B29-F687-4f45-9708-019B960494DF}">
-              <a14:hiddenLine xmlns:a14="http://schemas.microsoft.com/office/drawing/2010/main" xmlns="" w="9525">
+              <a14:hiddenLine xmlns="" xmlns:a14="http://schemas.microsoft.com/office/drawing/2010/main" w="9525">
                 <a:solidFill>
                   <a:srgbClr val="000000"/>
                 </a:solidFill>
@@ -9630,12 +9634,24 @@
           <a:p>
             <a:r>
               <a:rPr lang="en-IE" sz="1400" dirty="0"/>
-              <a:t>  if x &lt; y then -1</a:t>
+              <a:t>  </a:t>
+            </a:r>
+            <a:r>
+              <a:rPr lang="en-IE" sz="1400" b="1" dirty="0">
+                <a:solidFill>
+                  <a:schemeClr val="bg1"/>
+                </a:solidFill>
+              </a:rPr>
+              <a:t>if x &lt; y then -1</a:t>
             </a:r>
           </a:p>
           <a:p>
             <a:r>
-              <a:rPr lang="en-IE" sz="1400" dirty="0"/>
+              <a:rPr lang="en-IE" sz="1400" b="1" dirty="0">
+                <a:solidFill>
+                  <a:schemeClr val="bg1"/>
+                </a:solidFill>
+              </a:rPr>
               <a:t>  else 1</a:t>
             </a:r>
           </a:p>
@@ -9683,7 +9699,19 @@
           <a:p>
             <a:r>
               <a:rPr lang="en-US" sz="1400" dirty="0"/>
-              <a:t>(\x y -&gt; if x &lt; y then -1 else 1) 3 4</a:t>
+              <a:t>(\x y -&gt; </a:t>
+            </a:r>
+            <a:r>
+              <a:rPr lang="en-US" sz="1400" dirty="0">
+                <a:solidFill>
+                  <a:schemeClr val="bg1"/>
+                </a:solidFill>
+              </a:rPr>
+              <a:t>if x &lt; y then -1 else 1</a:t>
+            </a:r>
+            <a:r>
+              <a:rPr lang="en-US" sz="1400" dirty="0"/>
+              <a:t>) 3 4</a:t>
             </a:r>
           </a:p>
           <a:p>
@@ -9827,14 +9855,14 @@
           </a:xfrm>
           <a:extLst>
             <a:ext uri="{909E8E84-426E-40dd-AFC4-6F175D3DCCD1}">
-              <a14:hiddenFill xmlns:a14="http://schemas.microsoft.com/office/drawing/2010/main" xmlns="">
+              <a14:hiddenFill xmlns="" xmlns:a14="http://schemas.microsoft.com/office/drawing/2010/main">
                 <a:solidFill>
                   <a:srgbClr val="FFFFFF"/>
                 </a:solidFill>
               </a14:hiddenFill>
             </a:ext>
             <a:ext uri="{91240B29-F687-4f45-9708-019B960494DF}">
-              <a14:hiddenLine xmlns:a14="http://schemas.microsoft.com/office/drawing/2010/main" xmlns="" w="9525">
+              <a14:hiddenLine xmlns="" xmlns:a14="http://schemas.microsoft.com/office/drawing/2010/main" w="9525">
                 <a:solidFill>
                   <a:srgbClr val="000000"/>
                 </a:solidFill>
@@ -10554,14 +10582,14 @@
           </a:xfrm>
           <a:extLst>
             <a:ext uri="{909E8E84-426E-40dd-AFC4-6F175D3DCCD1}">
-              <a14:hiddenFill xmlns:a14="http://schemas.microsoft.com/office/drawing/2010/main" xmlns="">
+              <a14:hiddenFill xmlns="" xmlns:a14="http://schemas.microsoft.com/office/drawing/2010/main">
                 <a:solidFill>
                   <a:srgbClr val="FFFFFF"/>
                 </a:solidFill>
               </a14:hiddenFill>
             </a:ext>
             <a:ext uri="{91240B29-F687-4f45-9708-019B960494DF}">
-              <a14:hiddenLine xmlns:a14="http://schemas.microsoft.com/office/drawing/2010/main" xmlns="" w="9525">
+              <a14:hiddenLine xmlns="" xmlns:a14="http://schemas.microsoft.com/office/drawing/2010/main" w="9525">
                 <a:solidFill>
                   <a:srgbClr val="000000"/>
                 </a:solidFill>
@@ -12317,14 +12345,14 @@
           </a:xfrm>
           <a:extLst>
             <a:ext uri="{909E8E84-426E-40dd-AFC4-6F175D3DCCD1}">
-              <a14:hiddenFill xmlns:a14="http://schemas.microsoft.com/office/drawing/2010/main" xmlns="">
+              <a14:hiddenFill xmlns="" xmlns:a14="http://schemas.microsoft.com/office/drawing/2010/main">
                 <a:solidFill>
                   <a:srgbClr val="FFFFFF"/>
                 </a:solidFill>
               </a14:hiddenFill>
             </a:ext>
             <a:ext uri="{91240B29-F687-4f45-9708-019B960494DF}">
-              <a14:hiddenLine xmlns:a14="http://schemas.microsoft.com/office/drawing/2010/main" xmlns="" w="9525">
+              <a14:hiddenLine xmlns="" xmlns:a14="http://schemas.microsoft.com/office/drawing/2010/main" w="9525">
                 <a:solidFill>
                   <a:srgbClr val="000000"/>
                 </a:solidFill>
@@ -14568,14 +14596,14 @@
           </a:xfrm>
           <a:extLst>
             <a:ext uri="{909E8E84-426E-40dd-AFC4-6F175D3DCCD1}">
-              <a14:hiddenFill xmlns:a14="http://schemas.microsoft.com/office/drawing/2010/main" xmlns="">
+              <a14:hiddenFill xmlns="" xmlns:a14="http://schemas.microsoft.com/office/drawing/2010/main">
                 <a:solidFill>
                   <a:srgbClr val="FFFFFF"/>
                 </a:solidFill>
               </a14:hiddenFill>
             </a:ext>
             <a:ext uri="{91240B29-F687-4f45-9708-019B960494DF}">
-              <a14:hiddenLine xmlns:a14="http://schemas.microsoft.com/office/drawing/2010/main" xmlns="" w="9525">
+              <a14:hiddenLine xmlns="" xmlns:a14="http://schemas.microsoft.com/office/drawing/2010/main" w="9525">
                 <a:solidFill>
                   <a:srgbClr val="000000"/>
                 </a:solidFill>
@@ -15348,6 +15376,11 @@
           <a:prstGeom prst="rect">
             <a:avLst/>
           </a:prstGeom>
+          <a:ln>
+            <a:solidFill>
+              <a:schemeClr val="accent1"/>
+            </a:solidFill>
+          </a:ln>
         </p:spPr>
         <p:txBody>
           <a:bodyPr vert="horz" wrap="square" lIns="0" tIns="6985" rIns="0" bIns="0" rtlCol="0">
@@ -15792,14 +15825,14 @@
               <a:buNone/>
             </a:pPr>
             <a:r>
-              <a:rPr i="1" spc="50" dirty="0">
+              <a:rPr i="1" spc="50" dirty="0" err="1">
                 <a:latin typeface="Times New Roman"/>
                 <a:cs typeface="Times New Roman"/>
               </a:rPr>
               <a:t>λ</a:t>
             </a:r>
             <a:r>
-              <a:rPr i="1" spc="50" dirty="0">
+              <a:rPr i="1" spc="50" dirty="0" err="1">
                 <a:latin typeface="Arial"/>
                 <a:cs typeface="Arial"/>
               </a:rPr>
@@ -15817,28 +15850,28 @@
               <a:t>(</a:t>
             </a:r>
             <a:r>
-              <a:rPr i="1" spc="20" dirty="0">
+              <a:rPr i="1" spc="20" dirty="0" err="1">
                 <a:latin typeface="Times New Roman"/>
                 <a:cs typeface="Times New Roman"/>
               </a:rPr>
               <a:t>λ</a:t>
             </a:r>
             <a:r>
-              <a:rPr i="1" spc="20" dirty="0">
+              <a:rPr i="1" spc="20" dirty="0" err="1">
                 <a:latin typeface="Arial"/>
                 <a:cs typeface="Arial"/>
               </a:rPr>
               <a:t>y</a:t>
             </a:r>
             <a:r>
-              <a:rPr i="1" spc="20" dirty="0">
+              <a:rPr i="1" spc="20" dirty="0" err="1">
                 <a:latin typeface="Times New Roman"/>
                 <a:cs typeface="Times New Roman"/>
               </a:rPr>
               <a:t>.</a:t>
             </a:r>
             <a:r>
-              <a:rPr i="1" spc="20" dirty="0">
+              <a:rPr i="1" spc="20" dirty="0" err="1">
                 <a:latin typeface="Arial"/>
                 <a:cs typeface="Arial"/>
               </a:rPr>
@@ -15855,6 +15888,7 @@
               <a:rPr spc="5" dirty="0"/>
               <a:t>)</a:t>
             </a:r>
+            <a:endParaRPr lang="en-IE" spc="5" dirty="0"/>
           </a:p>
         </p:txBody>
       </p:sp>
@@ -15881,14 +15915,14 @@
           </a:xfrm>
           <a:extLst>
             <a:ext uri="{909E8E84-426E-40dd-AFC4-6F175D3DCCD1}">
-              <a14:hiddenFill xmlns:a14="http://schemas.microsoft.com/office/drawing/2010/main" xmlns="">
+              <a14:hiddenFill xmlns="" xmlns:a14="http://schemas.microsoft.com/office/drawing/2010/main">
                 <a:solidFill>
                   <a:srgbClr val="FFFFFF"/>
                 </a:solidFill>
               </a14:hiddenFill>
             </a:ext>
             <a:ext uri="{91240B29-F687-4f45-9708-019B960494DF}">
-              <a14:hiddenLine xmlns:a14="http://schemas.microsoft.com/office/drawing/2010/main" xmlns="" w="9525">
+              <a14:hiddenLine xmlns="" xmlns:a14="http://schemas.microsoft.com/office/drawing/2010/main" w="9525">
                 <a:solidFill>
                   <a:srgbClr val="000000"/>
                 </a:solidFill>
@@ -16027,6 +16061,60 @@
               <a:t>15</a:t>
             </a:fld>
             <a:endParaRPr lang="en-US" sz="706" dirty="0"/>
+          </a:p>
+        </p:txBody>
+      </p:sp>
+      <p:sp>
+        <p:nvSpPr>
+          <p:cNvPr id="5" name="TextBox 4">
+            <a:extLst>
+              <a:ext uri="{FF2B5EF4-FFF2-40B4-BE49-F238E27FC236}">
+                <a16:creationId xmlns:a16="http://schemas.microsoft.com/office/drawing/2014/main" id="{68AEB62A-1C07-0240-5E5F-8DB68034385A}"/>
+              </a:ext>
+            </a:extLst>
+          </p:cNvPr>
+          <p:cNvSpPr txBox="1"/>
+          <p:nvPr/>
+        </p:nvSpPr>
+        <p:spPr>
+          <a:xfrm>
+            <a:off x="1269617" y="3152351"/>
+            <a:ext cx="2015936" cy="276999"/>
+          </a:xfrm>
+          <a:prstGeom prst="rect">
+            <a:avLst/>
+          </a:prstGeom>
+          <a:solidFill>
+            <a:schemeClr val="accent4"/>
+          </a:solidFill>
+          <a:ln>
+            <a:solidFill>
+              <a:schemeClr val="bg1"/>
+            </a:solidFill>
+          </a:ln>
+        </p:spPr>
+        <p:txBody>
+          <a:bodyPr wrap="none" rtlCol="0">
+            <a:spAutoFit/>
+          </a:bodyPr>
+          <a:lstStyle/>
+          <a:p>
+            <a:r>
+              <a:rPr lang="en-US" sz="1200" dirty="0">
+                <a:solidFill>
+                  <a:schemeClr val="bg1"/>
+                </a:solidFill>
+              </a:rPr>
+              <a:t>Haskell version. </a:t>
+            </a:r>
+            <a:r>
+              <a:rPr lang="en-IE" sz="1200" spc="5" dirty="0">
+                <a:solidFill>
+                  <a:schemeClr val="bg1"/>
+                </a:solidFill>
+              </a:rPr>
+              <a:t>\x y -&gt; x*y</a:t>
+            </a:r>
           </a:p>
         </p:txBody>
       </p:sp>
@@ -16422,6 +16510,97 @@
                       </p:childTnLst>
                     </p:cTn>
                   </p:par>
+                  <p:par>
+                    <p:cTn id="23" fill="hold">
+                      <p:stCondLst>
+                        <p:cond delay="indefinite"/>
+                      </p:stCondLst>
+                      <p:childTnLst>
+                        <p:par>
+                          <p:cTn id="24" fill="hold">
+                            <p:stCondLst>
+                              <p:cond delay="0"/>
+                            </p:stCondLst>
+                            <p:childTnLst>
+                              <p:par>
+                                <p:cTn id="25" presetID="2" presetClass="entr" presetSubtype="4" fill="hold" grpId="0" nodeType="clickEffect">
+                                  <p:stCondLst>
+                                    <p:cond delay="0"/>
+                                  </p:stCondLst>
+                                  <p:childTnLst>
+                                    <p:set>
+                                      <p:cBhvr>
+                                        <p:cTn id="26" dur="1" fill="hold">
+                                          <p:stCondLst>
+                                            <p:cond delay="0"/>
+                                          </p:stCondLst>
+                                        </p:cTn>
+                                        <p:tgtEl>
+                                          <p:spTgt spid="5"/>
+                                        </p:tgtEl>
+                                        <p:attrNameLst>
+                                          <p:attrName>style.visibility</p:attrName>
+                                        </p:attrNameLst>
+                                      </p:cBhvr>
+                                      <p:to>
+                                        <p:strVal val="visible"/>
+                                      </p:to>
+                                    </p:set>
+                                    <p:anim calcmode="lin" valueType="num">
+                                      <p:cBhvr additive="base">
+                                        <p:cTn id="27" dur="500" fill="hold"/>
+                                        <p:tgtEl>
+                                          <p:spTgt spid="5"/>
+                                        </p:tgtEl>
+                                        <p:attrNameLst>
+                                          <p:attrName>ppt_x</p:attrName>
+                                        </p:attrNameLst>
+                                      </p:cBhvr>
+                                      <p:tavLst>
+                                        <p:tav tm="0">
+                                          <p:val>
+                                            <p:strVal val="#ppt_x"/>
+                                          </p:val>
+                                        </p:tav>
+                                        <p:tav tm="100000">
+                                          <p:val>
+                                            <p:strVal val="#ppt_x"/>
+                                          </p:val>
+                                        </p:tav>
+                                      </p:tavLst>
+                                    </p:anim>
+                                    <p:anim calcmode="lin" valueType="num">
+                                      <p:cBhvr additive="base">
+                                        <p:cTn id="28" dur="500" fill="hold"/>
+                                        <p:tgtEl>
+                                          <p:spTgt spid="5"/>
+                                        </p:tgtEl>
+                                        <p:attrNameLst>
+                                          <p:attrName>ppt_y</p:attrName>
+                                        </p:attrNameLst>
+                                      </p:cBhvr>
+                                      <p:tavLst>
+                                        <p:tav tm="0">
+                                          <p:val>
+                                            <p:strVal val="1+#ppt_h/2"/>
+                                          </p:val>
+                                        </p:tav>
+                                        <p:tav tm="100000">
+                                          <p:val>
+                                            <p:strVal val="#ppt_y"/>
+                                          </p:val>
+                                        </p:tav>
+                                      </p:tavLst>
+                                    </p:anim>
+                                  </p:childTnLst>
+                                </p:cTn>
+                              </p:par>
+                            </p:childTnLst>
+                          </p:cTn>
+                        </p:par>
+                      </p:childTnLst>
+                    </p:cTn>
+                  </p:par>
                 </p:childTnLst>
               </p:cTn>
               <p:prevCondLst>
@@ -16443,6 +16622,9 @@
         </p:cTn>
       </p:par>
     </p:tnLst>
+    <p:bldLst>
+      <p:bldP spid="5" grpId="0" animBg="1"/>
+    </p:bldLst>
   </p:timing>
 </p:sld>
 </file>
@@ -19053,14 +19235,14 @@
           </a:xfrm>
           <a:extLst>
             <a:ext uri="{909E8E84-426E-40dd-AFC4-6F175D3DCCD1}">
-              <a14:hiddenFill xmlns:a14="http://schemas.microsoft.com/office/drawing/2010/main" xmlns="">
+              <a14:hiddenFill xmlns="" xmlns:a14="http://schemas.microsoft.com/office/drawing/2010/main">
                 <a:solidFill>
                   <a:srgbClr val="FFFFFF"/>
                 </a:solidFill>
               </a14:hiddenFill>
             </a:ext>
             <a:ext uri="{91240B29-F687-4f45-9708-019B960494DF}">
-              <a14:hiddenLine xmlns:a14="http://schemas.microsoft.com/office/drawing/2010/main" xmlns="" w="9525">
+              <a14:hiddenLine xmlns="" xmlns:a14="http://schemas.microsoft.com/office/drawing/2010/main" w="9525">
                 <a:solidFill>
                   <a:srgbClr val="000000"/>
                 </a:solidFill>
@@ -19445,205 +19627,42 @@
           <a:chExt cx="0" cy="0"/>
         </a:xfrm>
       </p:grpSpPr>
-      <p:pic>
-        <p:nvPicPr>
-          <p:cNvPr id="42" name="Picture 41" descr="Text&#10;&#10;Description automatically generated">
+      <p:sp>
+        <p:nvSpPr>
+          <p:cNvPr id="2" name="Title 1">
             <a:extLst>
               <a:ext uri="{FF2B5EF4-FFF2-40B4-BE49-F238E27FC236}">
-                <a16:creationId xmlns:a16="http://schemas.microsoft.com/office/drawing/2014/main" id="{2C6DED11-E24C-1747-9B8B-24AF63DEAB2F}"/>
+                <a16:creationId xmlns:a16="http://schemas.microsoft.com/office/drawing/2014/main" id="{78095029-5616-95E7-E7D2-5D87571599C5}"/>
               </a:ext>
             </a:extLst>
           </p:cNvPr>
-          <p:cNvPicPr>
-            <a:picLocks noChangeAspect="1"/>
-          </p:cNvPicPr>
-          <p:nvPr/>
-        </p:nvPicPr>
-        <p:blipFill>
-          <a:blip r:embed="rId2"/>
-          <a:stretch>
-            <a:fillRect/>
-          </a:stretch>
-        </p:blipFill>
-        <p:spPr>
-          <a:xfrm>
-            <a:off x="494726" y="599364"/>
-            <a:ext cx="3285707" cy="2497138"/>
-          </a:xfrm>
-          <a:prstGeom prst="rect">
-            <a:avLst/>
-          </a:prstGeom>
-          <a:noFill/>
-        </p:spPr>
-      </p:pic>
-      <p:sp>
-        <p:nvSpPr>
-          <p:cNvPr id="16385" name="Slide Number Placeholder 2"/>
           <p:cNvSpPr>
             <a:spLocks noGrp="1"/>
           </p:cNvSpPr>
           <p:nvPr>
-            <p:ph type="sldNum" sz="quarter" idx="12"/>
+            <p:ph type="title"/>
           </p:nvPr>
         </p:nvSpPr>
-        <p:spPr>
-          <a:extLst>
-            <a:ext uri="{909E8E84-426E-40dd-AFC4-6F175D3DCCD1}">
-              <a14:hiddenFill xmlns:a14="http://schemas.microsoft.com/office/drawing/2010/main" xmlns="">
-                <a:solidFill>
-                  <a:srgbClr val="FFFFFF"/>
-                </a:solidFill>
-              </a14:hiddenFill>
-            </a:ext>
-            <a:ext uri="{91240B29-F687-4f45-9708-019B960494DF}">
-              <a14:hiddenLine xmlns:a14="http://schemas.microsoft.com/office/drawing/2010/main" xmlns="" w="9525">
-                <a:solidFill>
-                  <a:srgbClr val="000000"/>
-                </a:solidFill>
-                <a:miter lim="800000"/>
-                <a:headEnd/>
-                <a:tailEnd/>
-              </a14:hiddenLine>
-            </a:ext>
-          </a:extLst>
-        </p:spPr>
+        <p:spPr/>
         <p:txBody>
-          <a:bodyPr wrap="square" anchor="t">
-            <a:normAutofit/>
+          <a:bodyPr>
+            <a:normAutofit fontScale="90000"/>
           </a:bodyPr>
-          <a:lstStyle>
-            <a:lvl1pPr>
-              <a:defRPr sz="1412">
-                <a:solidFill>
-                  <a:schemeClr val="tx1"/>
-                </a:solidFill>
-                <a:latin typeface="Tahoma" charset="0"/>
-                <a:ea typeface="ＭＳ Ｐゴシック" charset="0"/>
-                <a:cs typeface="ＭＳ Ｐゴシック" charset="0"/>
-              </a:defRPr>
-            </a:lvl1pPr>
-            <a:lvl2pPr marL="374595" indent="-144075">
-              <a:defRPr sz="1412">
-                <a:solidFill>
-                  <a:schemeClr val="tx1"/>
-                </a:solidFill>
-                <a:latin typeface="Tahoma" charset="0"/>
-                <a:ea typeface="ＭＳ Ｐゴシック" charset="0"/>
-              </a:defRPr>
-            </a:lvl2pPr>
-            <a:lvl3pPr marL="576301" indent="-115260">
-              <a:defRPr sz="1412">
-                <a:solidFill>
-                  <a:schemeClr val="tx1"/>
-                </a:solidFill>
-                <a:latin typeface="Tahoma" charset="0"/>
-                <a:ea typeface="ＭＳ Ｐゴシック" charset="0"/>
-              </a:defRPr>
-            </a:lvl3pPr>
-            <a:lvl4pPr marL="806821" indent="-115260">
-              <a:defRPr sz="1412">
-                <a:solidFill>
-                  <a:schemeClr val="tx1"/>
-                </a:solidFill>
-                <a:latin typeface="Tahoma" charset="0"/>
-                <a:ea typeface="ＭＳ Ｐゴシック" charset="0"/>
-              </a:defRPr>
-            </a:lvl4pPr>
-            <a:lvl5pPr marL="1037341" indent="-115260">
-              <a:defRPr sz="1412">
-                <a:solidFill>
-                  <a:schemeClr val="tx1"/>
-                </a:solidFill>
-                <a:latin typeface="Tahoma" charset="0"/>
-                <a:ea typeface="ＭＳ Ｐゴシック" charset="0"/>
-              </a:defRPr>
-            </a:lvl5pPr>
-            <a:lvl6pPr marL="1267861" indent="-115260" eaLnBrk="0" fontAlgn="base" hangingPunct="0">
-              <a:spcBef>
-                <a:spcPct val="0"/>
-              </a:spcBef>
-              <a:spcAft>
-                <a:spcPct val="0"/>
-              </a:spcAft>
-              <a:defRPr sz="1412">
-                <a:solidFill>
-                  <a:schemeClr val="tx1"/>
-                </a:solidFill>
-                <a:latin typeface="Tahoma" charset="0"/>
-                <a:ea typeface="ＭＳ Ｐゴシック" charset="0"/>
-              </a:defRPr>
-            </a:lvl6pPr>
-            <a:lvl7pPr marL="1498382" indent="-115260" eaLnBrk="0" fontAlgn="base" hangingPunct="0">
-              <a:spcBef>
-                <a:spcPct val="0"/>
-              </a:spcBef>
-              <a:spcAft>
-                <a:spcPct val="0"/>
-              </a:spcAft>
-              <a:defRPr sz="1412">
-                <a:solidFill>
-                  <a:schemeClr val="tx1"/>
-                </a:solidFill>
-                <a:latin typeface="Tahoma" charset="0"/>
-                <a:ea typeface="ＭＳ Ｐゴシック" charset="0"/>
-              </a:defRPr>
-            </a:lvl7pPr>
-            <a:lvl8pPr marL="1728902" indent="-115260" eaLnBrk="0" fontAlgn="base" hangingPunct="0">
-              <a:spcBef>
-                <a:spcPct val="0"/>
-              </a:spcBef>
-              <a:spcAft>
-                <a:spcPct val="0"/>
-              </a:spcAft>
-              <a:defRPr sz="1412">
-                <a:solidFill>
-                  <a:schemeClr val="tx1"/>
-                </a:solidFill>
-                <a:latin typeface="Tahoma" charset="0"/>
-                <a:ea typeface="ＭＳ Ｐゴシック" charset="0"/>
-              </a:defRPr>
-            </a:lvl8pPr>
-            <a:lvl9pPr marL="1959422" indent="-115260" eaLnBrk="0" fontAlgn="base" hangingPunct="0">
-              <a:spcBef>
-                <a:spcPct val="0"/>
-              </a:spcBef>
-              <a:spcAft>
-                <a:spcPct val="0"/>
-              </a:spcAft>
-              <a:defRPr sz="1412">
-                <a:solidFill>
-                  <a:schemeClr val="tx1"/>
-                </a:solidFill>
-                <a:latin typeface="Tahoma" charset="0"/>
-                <a:ea typeface="ＭＳ Ｐゴシック" charset="0"/>
-              </a:defRPr>
-            </a:lvl9pPr>
-          </a:lstStyle>
+          <a:lstStyle/>
           <a:p>
-            <a:pPr>
-              <a:spcAft>
-                <a:spcPts val="303"/>
-              </a:spcAft>
-            </a:pPr>
-            <a:fld id="{CC73A6B6-49ED-C641-8D95-0A84FA800C15}" type="slidenum">
-              <a:rPr lang="en-US" sz="706"/>
-              <a:pPr>
-                <a:spcAft>
-                  <a:spcPts val="303"/>
-                </a:spcAft>
-              </a:pPr>
-              <a:t>17</a:t>
-            </a:fld>
-            <a:endParaRPr lang="en-US" sz="706" dirty="0"/>
+            <a:r>
+              <a:rPr lang="en-US" dirty="0"/>
+              <a:t>Possible Errors – 1 – missing else</a:t>
+            </a:r>
           </a:p>
         </p:txBody>
       </p:sp>
       <p:sp>
         <p:nvSpPr>
-          <p:cNvPr id="3" name="TextBox 2">
+          <p:cNvPr id="4" name="TextBox 3">
             <a:extLst>
               <a:ext uri="{FF2B5EF4-FFF2-40B4-BE49-F238E27FC236}">
-                <a16:creationId xmlns:a16="http://schemas.microsoft.com/office/drawing/2014/main" id="{978BE327-ECF9-8AAA-101C-567717DCFCF3}"/>
+                <a16:creationId xmlns:a16="http://schemas.microsoft.com/office/drawing/2014/main" id="{15849780-08B4-6C87-DEA7-672B6A110B5D}"/>
               </a:ext>
             </a:extLst>
           </p:cNvPr>
@@ -19652,8 +19671,103 @@
         </p:nvSpPr>
         <p:spPr>
           <a:xfrm>
-            <a:off x="3273953" y="236000"/>
-            <a:ext cx="184731" cy="232051"/>
+            <a:off x="1130235" y="1453376"/>
+            <a:ext cx="1752600" cy="276999"/>
+          </a:xfrm>
+          <a:prstGeom prst="rect">
+            <a:avLst/>
+          </a:prstGeom>
+          <a:solidFill>
+            <a:schemeClr val="accent4"/>
+          </a:solidFill>
+          <a:ln>
+            <a:solidFill>
+              <a:schemeClr val="bg1"/>
+            </a:solidFill>
+          </a:ln>
+        </p:spPr>
+        <p:txBody>
+          <a:bodyPr wrap="square" rtlCol="0">
+            <a:spAutoFit/>
+          </a:bodyPr>
+          <a:lstStyle/>
+          <a:p>
+            <a:r>
+              <a:rPr lang="en-US" sz="1200" dirty="0">
+                <a:solidFill>
+                  <a:schemeClr val="bg1"/>
+                </a:solidFill>
+              </a:rPr>
+              <a:t>\x -&gt; if x &gt; 0 then x</a:t>
+            </a:r>
+          </a:p>
+        </p:txBody>
+      </p:sp>
+      <p:sp>
+        <p:nvSpPr>
+          <p:cNvPr id="5" name="Multiply 4">
+            <a:extLst>
+              <a:ext uri="{FF2B5EF4-FFF2-40B4-BE49-F238E27FC236}">
+                <a16:creationId xmlns:a16="http://schemas.microsoft.com/office/drawing/2014/main" id="{E5B59322-9111-7270-7EBB-9A030E1F7798}"/>
+              </a:ext>
+            </a:extLst>
+          </p:cNvPr>
+          <p:cNvSpPr/>
+          <p:nvPr/>
+        </p:nvSpPr>
+        <p:spPr>
+          <a:xfrm>
+            <a:off x="3155820" y="1366919"/>
+            <a:ext cx="412815" cy="411237"/>
+          </a:xfrm>
+          <a:prstGeom prst="mathMultiply">
+            <a:avLst/>
+          </a:prstGeom>
+          <a:solidFill>
+            <a:schemeClr val="accent5"/>
+          </a:solidFill>
+        </p:spPr>
+        <p:style>
+          <a:lnRef idx="2">
+            <a:schemeClr val="accent1">
+              <a:shade val="15000"/>
+            </a:schemeClr>
+          </a:lnRef>
+          <a:fillRef idx="1">
+            <a:schemeClr val="accent1"/>
+          </a:fillRef>
+          <a:effectRef idx="0">
+            <a:schemeClr val="accent1"/>
+          </a:effectRef>
+          <a:fontRef idx="minor">
+            <a:schemeClr val="lt1"/>
+          </a:fontRef>
+        </p:style>
+        <p:txBody>
+          <a:bodyPr rtlCol="0" anchor="ctr"/>
+          <a:lstStyle/>
+          <a:p>
+            <a:pPr algn="ctr"/>
+            <a:endParaRPr lang="en-US" dirty="0"/>
+          </a:p>
+        </p:txBody>
+      </p:sp>
+      <p:sp>
+        <p:nvSpPr>
+          <p:cNvPr id="6" name="TextBox 5">
+            <a:extLst>
+              <a:ext uri="{FF2B5EF4-FFF2-40B4-BE49-F238E27FC236}">
+                <a16:creationId xmlns:a16="http://schemas.microsoft.com/office/drawing/2014/main" id="{24E5F4A1-27C8-0580-84F8-66F2C444CA54}"/>
+              </a:ext>
+            </a:extLst>
+          </p:cNvPr>
+          <p:cNvSpPr txBox="1"/>
+          <p:nvPr/>
+        </p:nvSpPr>
+        <p:spPr>
+          <a:xfrm>
+            <a:off x="520634" y="1970964"/>
+            <a:ext cx="3613215" cy="738664"/>
           </a:xfrm>
           <a:prstGeom prst="rect">
             <a:avLst/>
@@ -19661,25 +19775,2637 @@
           <a:noFill/>
         </p:spPr>
         <p:txBody>
-          <a:bodyPr wrap="none" rtlCol="0">
+          <a:bodyPr wrap="square" rtlCol="0">
             <a:spAutoFit/>
           </a:bodyPr>
           <a:lstStyle/>
           <a:p>
-            <a:endParaRPr lang="en-US" sz="908" dirty="0"/>
+            <a:r>
+              <a:rPr lang="en-US" sz="1200" dirty="0">
+                <a:solidFill>
+                  <a:schemeClr val="bg1"/>
+                </a:solidFill>
+              </a:rPr>
+              <a:t>What’s wrong? </a:t>
+            </a:r>
+          </a:p>
+          <a:p>
+            <a:r>
+              <a:rPr lang="en-IE" dirty="0">
+                <a:solidFill>
+                  <a:schemeClr val="bg1"/>
+                </a:solidFill>
+              </a:rPr>
+              <a:t>if</a:t>
+            </a:r>
+            <a:r>
+              <a:rPr lang="en-IE" sz="1200" dirty="0">
+                <a:solidFill>
+                  <a:schemeClr val="bg1"/>
+                </a:solidFill>
+              </a:rPr>
+              <a:t> must return a value in </a:t>
+            </a:r>
+            <a:r>
+              <a:rPr lang="en-IE" sz="1200" i="1" dirty="0">
+                <a:solidFill>
+                  <a:schemeClr val="bg1"/>
+                </a:solidFill>
+              </a:rPr>
+              <a:t>all</a:t>
+            </a:r>
+            <a:r>
+              <a:rPr lang="en-IE" sz="1200" dirty="0">
+                <a:solidFill>
+                  <a:schemeClr val="bg1"/>
+                </a:solidFill>
+              </a:rPr>
+              <a:t> cases - always use an else.</a:t>
+            </a:r>
+            <a:r>
+              <a:rPr lang="en-US" sz="1200" dirty="0">
+                <a:solidFill>
+                  <a:schemeClr val="bg1"/>
+                </a:solidFill>
+              </a:rPr>
+              <a:t> </a:t>
+            </a:r>
+          </a:p>
+        </p:txBody>
+      </p:sp>
+      <p:sp>
+        <p:nvSpPr>
+          <p:cNvPr id="9" name="TextBox 8">
+            <a:extLst>
+              <a:ext uri="{FF2B5EF4-FFF2-40B4-BE49-F238E27FC236}">
+                <a16:creationId xmlns:a16="http://schemas.microsoft.com/office/drawing/2014/main" id="{EC5AEAB0-8B01-4B5A-B0EF-1A696EF58F2E}"/>
+              </a:ext>
+            </a:extLst>
+          </p:cNvPr>
+          <p:cNvSpPr txBox="1"/>
+          <p:nvPr/>
+        </p:nvSpPr>
+        <p:spPr>
+          <a:xfrm>
+            <a:off x="1109528" y="2942149"/>
+            <a:ext cx="2044976" cy="276999"/>
+          </a:xfrm>
+          <a:prstGeom prst="rect">
+            <a:avLst/>
+          </a:prstGeom>
+          <a:solidFill>
+            <a:schemeClr val="accent4"/>
+          </a:solidFill>
+          <a:ln>
+            <a:solidFill>
+              <a:schemeClr val="bg1"/>
+            </a:solidFill>
+          </a:ln>
+        </p:spPr>
+        <p:txBody>
+          <a:bodyPr wrap="square" rtlCol="0">
+            <a:spAutoFit/>
+          </a:bodyPr>
+          <a:lstStyle/>
+          <a:p>
+            <a:r>
+              <a:rPr lang="en-US" sz="1200" dirty="0">
+                <a:solidFill>
+                  <a:schemeClr val="bg1"/>
+                </a:solidFill>
+              </a:rPr>
+              <a:t>\x -&gt; if x &gt; 0 then x else 0</a:t>
+            </a:r>
+          </a:p>
+        </p:txBody>
+      </p:sp>
+      <p:sp>
+        <p:nvSpPr>
+          <p:cNvPr id="13" name="TextBox 12">
+            <a:extLst>
+              <a:ext uri="{FF2B5EF4-FFF2-40B4-BE49-F238E27FC236}">
+                <a16:creationId xmlns:a16="http://schemas.microsoft.com/office/drawing/2014/main" id="{5FA98468-EF58-1222-06D5-124798B5849A}"/>
+              </a:ext>
+            </a:extLst>
+          </p:cNvPr>
+          <p:cNvSpPr txBox="1"/>
+          <p:nvPr/>
+        </p:nvSpPr>
+        <p:spPr>
+          <a:xfrm>
+            <a:off x="3256381" y="2889995"/>
+            <a:ext cx="312254" cy="369332"/>
+          </a:xfrm>
+          <a:prstGeom prst="rect">
+            <a:avLst/>
+          </a:prstGeom>
+          <a:noFill/>
+        </p:spPr>
+        <p:txBody>
+          <a:bodyPr wrap="square">
+            <a:spAutoFit/>
+          </a:bodyPr>
+          <a:lstStyle/>
+          <a:p>
+            <a:r>
+              <a:rPr lang="en-IE" b="1" dirty="0">
+                <a:solidFill>
+                  <a:schemeClr val="accent2">
+                    <a:lumMod val="75000"/>
+                  </a:schemeClr>
+                </a:solidFill>
+              </a:rPr>
+              <a:t>✓</a:t>
+            </a:r>
+            <a:endParaRPr lang="en-US" b="1" dirty="0">
+              <a:solidFill>
+                <a:schemeClr val="accent2">
+                  <a:lumMod val="75000"/>
+                </a:schemeClr>
+              </a:solidFill>
+            </a:endParaRPr>
           </a:p>
         </p:txBody>
       </p:sp>
     </p:spTree>
     <p:extLst>
       <p:ext uri="{BB962C8B-B14F-4D97-AF65-F5344CB8AC3E}">
-        <p14:creationId xmlns:p14="http://schemas.microsoft.com/office/powerpoint/2010/main" val="1205145016"/>
+        <p14:creationId xmlns:p14="http://schemas.microsoft.com/office/powerpoint/2010/main" val="3963112282"/>
       </p:ext>
     </p:extLst>
   </p:cSld>
   <p:clrMapOvr>
     <a:masterClrMapping/>
   </p:clrMapOvr>
+  <p:timing>
+    <p:tnLst>
+      <p:par>
+        <p:cTn id="1" dur="indefinite" restart="never" nodeType="tmRoot">
+          <p:childTnLst>
+            <p:seq concurrent="1" nextAc="seek">
+              <p:cTn id="2" dur="indefinite" nodeType="mainSeq">
+                <p:childTnLst>
+                  <p:par>
+                    <p:cTn id="3" fill="hold">
+                      <p:stCondLst>
+                        <p:cond delay="indefinite"/>
+                      </p:stCondLst>
+                      <p:childTnLst>
+                        <p:par>
+                          <p:cTn id="4" fill="hold">
+                            <p:stCondLst>
+                              <p:cond delay="0"/>
+                            </p:stCondLst>
+                            <p:childTnLst>
+                              <p:par>
+                                <p:cTn id="5" presetID="2" presetClass="entr" presetSubtype="4" fill="hold" grpId="1" nodeType="clickEffect">
+                                  <p:stCondLst>
+                                    <p:cond delay="0"/>
+                                  </p:stCondLst>
+                                  <p:childTnLst>
+                                    <p:set>
+                                      <p:cBhvr>
+                                        <p:cTn id="6" dur="1" fill="hold">
+                                          <p:stCondLst>
+                                            <p:cond delay="0"/>
+                                          </p:stCondLst>
+                                        </p:cTn>
+                                        <p:tgtEl>
+                                          <p:spTgt spid="4"/>
+                                        </p:tgtEl>
+                                        <p:attrNameLst>
+                                          <p:attrName>style.visibility</p:attrName>
+                                        </p:attrNameLst>
+                                      </p:cBhvr>
+                                      <p:to>
+                                        <p:strVal val="visible"/>
+                                      </p:to>
+                                    </p:set>
+                                    <p:anim calcmode="lin" valueType="num">
+                                      <p:cBhvr additive="base">
+                                        <p:cTn id="7" dur="500" fill="hold"/>
+                                        <p:tgtEl>
+                                          <p:spTgt spid="4"/>
+                                        </p:tgtEl>
+                                        <p:attrNameLst>
+                                          <p:attrName>ppt_x</p:attrName>
+                                        </p:attrNameLst>
+                                      </p:cBhvr>
+                                      <p:tavLst>
+                                        <p:tav tm="0">
+                                          <p:val>
+                                            <p:strVal val="#ppt_x"/>
+                                          </p:val>
+                                        </p:tav>
+                                        <p:tav tm="100000">
+                                          <p:val>
+                                            <p:strVal val="#ppt_x"/>
+                                          </p:val>
+                                        </p:tav>
+                                      </p:tavLst>
+                                    </p:anim>
+                                    <p:anim calcmode="lin" valueType="num">
+                                      <p:cBhvr additive="base">
+                                        <p:cTn id="8" dur="500" fill="hold"/>
+                                        <p:tgtEl>
+                                          <p:spTgt spid="4"/>
+                                        </p:tgtEl>
+                                        <p:attrNameLst>
+                                          <p:attrName>ppt_y</p:attrName>
+                                        </p:attrNameLst>
+                                      </p:cBhvr>
+                                      <p:tavLst>
+                                        <p:tav tm="0">
+                                          <p:val>
+                                            <p:strVal val="1+#ppt_h/2"/>
+                                          </p:val>
+                                        </p:tav>
+                                        <p:tav tm="100000">
+                                          <p:val>
+                                            <p:strVal val="#ppt_y"/>
+                                          </p:val>
+                                        </p:tav>
+                                      </p:tavLst>
+                                    </p:anim>
+                                  </p:childTnLst>
+                                </p:cTn>
+                              </p:par>
+                            </p:childTnLst>
+                          </p:cTn>
+                        </p:par>
+                      </p:childTnLst>
+                    </p:cTn>
+                  </p:par>
+                  <p:par>
+                    <p:cTn id="9" fill="hold">
+                      <p:stCondLst>
+                        <p:cond delay="indefinite"/>
+                      </p:stCondLst>
+                      <p:childTnLst>
+                        <p:par>
+                          <p:cTn id="10" fill="hold">
+                            <p:stCondLst>
+                              <p:cond delay="0"/>
+                            </p:stCondLst>
+                            <p:childTnLst>
+                              <p:par>
+                                <p:cTn id="11" presetID="2" presetClass="entr" presetSubtype="4" fill="hold" grpId="0" nodeType="clickEffect">
+                                  <p:stCondLst>
+                                    <p:cond delay="0"/>
+                                  </p:stCondLst>
+                                  <p:childTnLst>
+                                    <p:set>
+                                      <p:cBhvr>
+                                        <p:cTn id="12" dur="1" fill="hold">
+                                          <p:stCondLst>
+                                            <p:cond delay="0"/>
+                                          </p:stCondLst>
+                                        </p:cTn>
+                                        <p:tgtEl>
+                                          <p:spTgt spid="5"/>
+                                        </p:tgtEl>
+                                        <p:attrNameLst>
+                                          <p:attrName>style.visibility</p:attrName>
+                                        </p:attrNameLst>
+                                      </p:cBhvr>
+                                      <p:to>
+                                        <p:strVal val="visible"/>
+                                      </p:to>
+                                    </p:set>
+                                    <p:anim calcmode="lin" valueType="num">
+                                      <p:cBhvr additive="base">
+                                        <p:cTn id="13" dur="500" fill="hold"/>
+                                        <p:tgtEl>
+                                          <p:spTgt spid="5"/>
+                                        </p:tgtEl>
+                                        <p:attrNameLst>
+                                          <p:attrName>ppt_x</p:attrName>
+                                        </p:attrNameLst>
+                                      </p:cBhvr>
+                                      <p:tavLst>
+                                        <p:tav tm="0">
+                                          <p:val>
+                                            <p:strVal val="#ppt_x"/>
+                                          </p:val>
+                                        </p:tav>
+                                        <p:tav tm="100000">
+                                          <p:val>
+                                            <p:strVal val="#ppt_x"/>
+                                          </p:val>
+                                        </p:tav>
+                                      </p:tavLst>
+                                    </p:anim>
+                                    <p:anim calcmode="lin" valueType="num">
+                                      <p:cBhvr additive="base">
+                                        <p:cTn id="14" dur="500" fill="hold"/>
+                                        <p:tgtEl>
+                                          <p:spTgt spid="5"/>
+                                        </p:tgtEl>
+                                        <p:attrNameLst>
+                                          <p:attrName>ppt_y</p:attrName>
+                                        </p:attrNameLst>
+                                      </p:cBhvr>
+                                      <p:tavLst>
+                                        <p:tav tm="0">
+                                          <p:val>
+                                            <p:strVal val="1+#ppt_h/2"/>
+                                          </p:val>
+                                        </p:tav>
+                                        <p:tav tm="100000">
+                                          <p:val>
+                                            <p:strVal val="#ppt_y"/>
+                                          </p:val>
+                                        </p:tav>
+                                      </p:tavLst>
+                                    </p:anim>
+                                  </p:childTnLst>
+                                </p:cTn>
+                              </p:par>
+                            </p:childTnLst>
+                          </p:cTn>
+                        </p:par>
+                      </p:childTnLst>
+                    </p:cTn>
+                  </p:par>
+                  <p:par>
+                    <p:cTn id="15" fill="hold">
+                      <p:stCondLst>
+                        <p:cond delay="indefinite"/>
+                      </p:stCondLst>
+                      <p:childTnLst>
+                        <p:par>
+                          <p:cTn id="16" fill="hold">
+                            <p:stCondLst>
+                              <p:cond delay="0"/>
+                            </p:stCondLst>
+                            <p:childTnLst>
+                              <p:par>
+                                <p:cTn id="17" presetID="2" presetClass="entr" presetSubtype="4" fill="hold" nodeType="clickEffect">
+                                  <p:stCondLst>
+                                    <p:cond delay="0"/>
+                                  </p:stCondLst>
+                                  <p:childTnLst>
+                                    <p:set>
+                                      <p:cBhvr>
+                                        <p:cTn id="18" dur="1" fill="hold">
+                                          <p:stCondLst>
+                                            <p:cond delay="0"/>
+                                          </p:stCondLst>
+                                        </p:cTn>
+                                        <p:tgtEl>
+                                          <p:spTgt spid="6">
+                                            <p:txEl>
+                                              <p:pRg st="0" end="0"/>
+                                            </p:txEl>
+                                          </p:spTgt>
+                                        </p:tgtEl>
+                                        <p:attrNameLst>
+                                          <p:attrName>style.visibility</p:attrName>
+                                        </p:attrNameLst>
+                                      </p:cBhvr>
+                                      <p:to>
+                                        <p:strVal val="visible"/>
+                                      </p:to>
+                                    </p:set>
+                                    <p:anim calcmode="lin" valueType="num">
+                                      <p:cBhvr additive="base">
+                                        <p:cTn id="19" dur="500" fill="hold"/>
+                                        <p:tgtEl>
+                                          <p:spTgt spid="6">
+                                            <p:txEl>
+                                              <p:pRg st="0" end="0"/>
+                                            </p:txEl>
+                                          </p:spTgt>
+                                        </p:tgtEl>
+                                        <p:attrNameLst>
+                                          <p:attrName>ppt_x</p:attrName>
+                                        </p:attrNameLst>
+                                      </p:cBhvr>
+                                      <p:tavLst>
+                                        <p:tav tm="0">
+                                          <p:val>
+                                            <p:strVal val="#ppt_x"/>
+                                          </p:val>
+                                        </p:tav>
+                                        <p:tav tm="100000">
+                                          <p:val>
+                                            <p:strVal val="#ppt_x"/>
+                                          </p:val>
+                                        </p:tav>
+                                      </p:tavLst>
+                                    </p:anim>
+                                    <p:anim calcmode="lin" valueType="num">
+                                      <p:cBhvr additive="base">
+                                        <p:cTn id="20" dur="500" fill="hold"/>
+                                        <p:tgtEl>
+                                          <p:spTgt spid="6">
+                                            <p:txEl>
+                                              <p:pRg st="0" end="0"/>
+                                            </p:txEl>
+                                          </p:spTgt>
+                                        </p:tgtEl>
+                                        <p:attrNameLst>
+                                          <p:attrName>ppt_y</p:attrName>
+                                        </p:attrNameLst>
+                                      </p:cBhvr>
+                                      <p:tavLst>
+                                        <p:tav tm="0">
+                                          <p:val>
+                                            <p:strVal val="1+#ppt_h/2"/>
+                                          </p:val>
+                                        </p:tav>
+                                        <p:tav tm="100000">
+                                          <p:val>
+                                            <p:strVal val="#ppt_y"/>
+                                          </p:val>
+                                        </p:tav>
+                                      </p:tavLst>
+                                    </p:anim>
+                                  </p:childTnLst>
+                                </p:cTn>
+                              </p:par>
+                            </p:childTnLst>
+                          </p:cTn>
+                        </p:par>
+                      </p:childTnLst>
+                    </p:cTn>
+                  </p:par>
+                  <p:par>
+                    <p:cTn id="21" fill="hold">
+                      <p:stCondLst>
+                        <p:cond delay="indefinite"/>
+                      </p:stCondLst>
+                      <p:childTnLst>
+                        <p:par>
+                          <p:cTn id="22" fill="hold">
+                            <p:stCondLst>
+                              <p:cond delay="0"/>
+                            </p:stCondLst>
+                            <p:childTnLst>
+                              <p:par>
+                                <p:cTn id="23" presetID="2" presetClass="entr" presetSubtype="4" fill="hold" nodeType="clickEffect">
+                                  <p:stCondLst>
+                                    <p:cond delay="0"/>
+                                  </p:stCondLst>
+                                  <p:childTnLst>
+                                    <p:set>
+                                      <p:cBhvr>
+                                        <p:cTn id="24" dur="1" fill="hold">
+                                          <p:stCondLst>
+                                            <p:cond delay="0"/>
+                                          </p:stCondLst>
+                                        </p:cTn>
+                                        <p:tgtEl>
+                                          <p:spTgt spid="6">
+                                            <p:txEl>
+                                              <p:pRg st="1" end="1"/>
+                                            </p:txEl>
+                                          </p:spTgt>
+                                        </p:tgtEl>
+                                        <p:attrNameLst>
+                                          <p:attrName>style.visibility</p:attrName>
+                                        </p:attrNameLst>
+                                      </p:cBhvr>
+                                      <p:to>
+                                        <p:strVal val="visible"/>
+                                      </p:to>
+                                    </p:set>
+                                    <p:anim calcmode="lin" valueType="num">
+                                      <p:cBhvr additive="base">
+                                        <p:cTn id="25" dur="500" fill="hold"/>
+                                        <p:tgtEl>
+                                          <p:spTgt spid="6">
+                                            <p:txEl>
+                                              <p:pRg st="1" end="1"/>
+                                            </p:txEl>
+                                          </p:spTgt>
+                                        </p:tgtEl>
+                                        <p:attrNameLst>
+                                          <p:attrName>ppt_x</p:attrName>
+                                        </p:attrNameLst>
+                                      </p:cBhvr>
+                                      <p:tavLst>
+                                        <p:tav tm="0">
+                                          <p:val>
+                                            <p:strVal val="#ppt_x"/>
+                                          </p:val>
+                                        </p:tav>
+                                        <p:tav tm="100000">
+                                          <p:val>
+                                            <p:strVal val="#ppt_x"/>
+                                          </p:val>
+                                        </p:tav>
+                                      </p:tavLst>
+                                    </p:anim>
+                                    <p:anim calcmode="lin" valueType="num">
+                                      <p:cBhvr additive="base">
+                                        <p:cTn id="26" dur="500" fill="hold"/>
+                                        <p:tgtEl>
+                                          <p:spTgt spid="6">
+                                            <p:txEl>
+                                              <p:pRg st="1" end="1"/>
+                                            </p:txEl>
+                                          </p:spTgt>
+                                        </p:tgtEl>
+                                        <p:attrNameLst>
+                                          <p:attrName>ppt_y</p:attrName>
+                                        </p:attrNameLst>
+                                      </p:cBhvr>
+                                      <p:tavLst>
+                                        <p:tav tm="0">
+                                          <p:val>
+                                            <p:strVal val="1+#ppt_h/2"/>
+                                          </p:val>
+                                        </p:tav>
+                                        <p:tav tm="100000">
+                                          <p:val>
+                                            <p:strVal val="#ppt_y"/>
+                                          </p:val>
+                                        </p:tav>
+                                      </p:tavLst>
+                                    </p:anim>
+                                  </p:childTnLst>
+                                </p:cTn>
+                              </p:par>
+                            </p:childTnLst>
+                          </p:cTn>
+                        </p:par>
+                      </p:childTnLst>
+                    </p:cTn>
+                  </p:par>
+                  <p:par>
+                    <p:cTn id="27" fill="hold">
+                      <p:stCondLst>
+                        <p:cond delay="indefinite"/>
+                      </p:stCondLst>
+                      <p:childTnLst>
+                        <p:par>
+                          <p:cTn id="28" fill="hold">
+                            <p:stCondLst>
+                              <p:cond delay="0"/>
+                            </p:stCondLst>
+                            <p:childTnLst>
+                              <p:par>
+                                <p:cTn id="29" presetID="2" presetClass="entr" presetSubtype="4" fill="hold" grpId="0" nodeType="clickEffect">
+                                  <p:stCondLst>
+                                    <p:cond delay="0"/>
+                                  </p:stCondLst>
+                                  <p:childTnLst>
+                                    <p:set>
+                                      <p:cBhvr>
+                                        <p:cTn id="30" dur="1" fill="hold">
+                                          <p:stCondLst>
+                                            <p:cond delay="0"/>
+                                          </p:stCondLst>
+                                        </p:cTn>
+                                        <p:tgtEl>
+                                          <p:spTgt spid="9"/>
+                                        </p:tgtEl>
+                                        <p:attrNameLst>
+                                          <p:attrName>style.visibility</p:attrName>
+                                        </p:attrNameLst>
+                                      </p:cBhvr>
+                                      <p:to>
+                                        <p:strVal val="visible"/>
+                                      </p:to>
+                                    </p:set>
+                                    <p:anim calcmode="lin" valueType="num">
+                                      <p:cBhvr additive="base">
+                                        <p:cTn id="31" dur="500" fill="hold"/>
+                                        <p:tgtEl>
+                                          <p:spTgt spid="9"/>
+                                        </p:tgtEl>
+                                        <p:attrNameLst>
+                                          <p:attrName>ppt_x</p:attrName>
+                                        </p:attrNameLst>
+                                      </p:cBhvr>
+                                      <p:tavLst>
+                                        <p:tav tm="0">
+                                          <p:val>
+                                            <p:strVal val="#ppt_x"/>
+                                          </p:val>
+                                        </p:tav>
+                                        <p:tav tm="100000">
+                                          <p:val>
+                                            <p:strVal val="#ppt_x"/>
+                                          </p:val>
+                                        </p:tav>
+                                      </p:tavLst>
+                                    </p:anim>
+                                    <p:anim calcmode="lin" valueType="num">
+                                      <p:cBhvr additive="base">
+                                        <p:cTn id="32" dur="500" fill="hold"/>
+                                        <p:tgtEl>
+                                          <p:spTgt spid="9"/>
+                                        </p:tgtEl>
+                                        <p:attrNameLst>
+                                          <p:attrName>ppt_y</p:attrName>
+                                        </p:attrNameLst>
+                                      </p:cBhvr>
+                                      <p:tavLst>
+                                        <p:tav tm="0">
+                                          <p:val>
+                                            <p:strVal val="1+#ppt_h/2"/>
+                                          </p:val>
+                                        </p:tav>
+                                        <p:tav tm="100000">
+                                          <p:val>
+                                            <p:strVal val="#ppt_y"/>
+                                          </p:val>
+                                        </p:tav>
+                                      </p:tavLst>
+                                    </p:anim>
+                                  </p:childTnLst>
+                                </p:cTn>
+                              </p:par>
+                            </p:childTnLst>
+                          </p:cTn>
+                        </p:par>
+                      </p:childTnLst>
+                    </p:cTn>
+                  </p:par>
+                  <p:par>
+                    <p:cTn id="33" fill="hold">
+                      <p:stCondLst>
+                        <p:cond delay="indefinite"/>
+                      </p:stCondLst>
+                      <p:childTnLst>
+                        <p:par>
+                          <p:cTn id="34" fill="hold">
+                            <p:stCondLst>
+                              <p:cond delay="0"/>
+                            </p:stCondLst>
+                            <p:childTnLst>
+                              <p:par>
+                                <p:cTn id="35" presetID="2" presetClass="entr" presetSubtype="4" fill="hold" grpId="0" nodeType="clickEffect">
+                                  <p:stCondLst>
+                                    <p:cond delay="0"/>
+                                  </p:stCondLst>
+                                  <p:childTnLst>
+                                    <p:set>
+                                      <p:cBhvr>
+                                        <p:cTn id="36" dur="1" fill="hold">
+                                          <p:stCondLst>
+                                            <p:cond delay="0"/>
+                                          </p:stCondLst>
+                                        </p:cTn>
+                                        <p:tgtEl>
+                                          <p:spTgt spid="13"/>
+                                        </p:tgtEl>
+                                        <p:attrNameLst>
+                                          <p:attrName>style.visibility</p:attrName>
+                                        </p:attrNameLst>
+                                      </p:cBhvr>
+                                      <p:to>
+                                        <p:strVal val="visible"/>
+                                      </p:to>
+                                    </p:set>
+                                    <p:anim calcmode="lin" valueType="num">
+                                      <p:cBhvr additive="base">
+                                        <p:cTn id="37" dur="500" fill="hold"/>
+                                        <p:tgtEl>
+                                          <p:spTgt spid="13"/>
+                                        </p:tgtEl>
+                                        <p:attrNameLst>
+                                          <p:attrName>ppt_x</p:attrName>
+                                        </p:attrNameLst>
+                                      </p:cBhvr>
+                                      <p:tavLst>
+                                        <p:tav tm="0">
+                                          <p:val>
+                                            <p:strVal val="#ppt_x"/>
+                                          </p:val>
+                                        </p:tav>
+                                        <p:tav tm="100000">
+                                          <p:val>
+                                            <p:strVal val="#ppt_x"/>
+                                          </p:val>
+                                        </p:tav>
+                                      </p:tavLst>
+                                    </p:anim>
+                                    <p:anim calcmode="lin" valueType="num">
+                                      <p:cBhvr additive="base">
+                                        <p:cTn id="38" dur="500" fill="hold"/>
+                                        <p:tgtEl>
+                                          <p:spTgt spid="13"/>
+                                        </p:tgtEl>
+                                        <p:attrNameLst>
+                                          <p:attrName>ppt_y</p:attrName>
+                                        </p:attrNameLst>
+                                      </p:cBhvr>
+                                      <p:tavLst>
+                                        <p:tav tm="0">
+                                          <p:val>
+                                            <p:strVal val="1+#ppt_h/2"/>
+                                          </p:val>
+                                        </p:tav>
+                                        <p:tav tm="100000">
+                                          <p:val>
+                                            <p:strVal val="#ppt_y"/>
+                                          </p:val>
+                                        </p:tav>
+                                      </p:tavLst>
+                                    </p:anim>
+                                  </p:childTnLst>
+                                </p:cTn>
+                              </p:par>
+                            </p:childTnLst>
+                          </p:cTn>
+                        </p:par>
+                      </p:childTnLst>
+                    </p:cTn>
+                  </p:par>
+                </p:childTnLst>
+              </p:cTn>
+              <p:prevCondLst>
+                <p:cond evt="onPrev" delay="0">
+                  <p:tgtEl>
+                    <p:sldTgt/>
+                  </p:tgtEl>
+                </p:cond>
+              </p:prevCondLst>
+              <p:nextCondLst>
+                <p:cond evt="onNext" delay="0">
+                  <p:tgtEl>
+                    <p:sldTgt/>
+                  </p:tgtEl>
+                </p:cond>
+              </p:nextCondLst>
+            </p:seq>
+          </p:childTnLst>
+        </p:cTn>
+      </p:par>
+    </p:tnLst>
+    <p:bldLst>
+      <p:bldP spid="4" grpId="1" animBg="1"/>
+      <p:bldP spid="5" grpId="0" animBg="1"/>
+      <p:bldP spid="9" grpId="0" animBg="1"/>
+      <p:bldP spid="13" grpId="0"/>
+    </p:bldLst>
+  </p:timing>
+</p:sld>
+</file>
+
+<file path=ppt/slides/slide18.xml><?xml version="1.0" encoding="utf-8"?>
+<p:sld xmlns:a="http://schemas.openxmlformats.org/drawingml/2006/main" xmlns:r="http://schemas.openxmlformats.org/officeDocument/2006/relationships" xmlns:p="http://schemas.openxmlformats.org/presentationml/2006/main">
+  <p:cSld>
+    <p:spTree>
+      <p:nvGrpSpPr>
+        <p:cNvPr id="1" name="">
+          <a:extLst>
+            <a:ext uri="{FF2B5EF4-FFF2-40B4-BE49-F238E27FC236}">
+              <a16:creationId xmlns:a16="http://schemas.microsoft.com/office/drawing/2014/main" id="{5118A939-7306-29F6-A1A1-7A4DE1D66C82}"/>
+            </a:ext>
+          </a:extLst>
+        </p:cNvPr>
+        <p:cNvGrpSpPr/>
+        <p:nvPr/>
+      </p:nvGrpSpPr>
+      <p:grpSpPr>
+        <a:xfrm>
+          <a:off x="0" y="0"/>
+          <a:ext cx="0" cy="0"/>
+          <a:chOff x="0" y="0"/>
+          <a:chExt cx="0" cy="0"/>
+        </a:xfrm>
+      </p:grpSpPr>
+      <p:sp>
+        <p:nvSpPr>
+          <p:cNvPr id="2" name="Title 1">
+            <a:extLst>
+              <a:ext uri="{FF2B5EF4-FFF2-40B4-BE49-F238E27FC236}">
+                <a16:creationId xmlns:a16="http://schemas.microsoft.com/office/drawing/2014/main" id="{98F16C8E-BF6A-0972-D791-159CA8D740D4}"/>
+              </a:ext>
+            </a:extLst>
+          </p:cNvPr>
+          <p:cNvSpPr>
+            <a:spLocks noGrp="1"/>
+          </p:cNvSpPr>
+          <p:nvPr>
+            <p:ph type="title"/>
+          </p:nvPr>
+        </p:nvSpPr>
+        <p:spPr/>
+        <p:txBody>
+          <a:bodyPr>
+            <a:normAutofit fontScale="90000"/>
+          </a:bodyPr>
+          <a:lstStyle/>
+          <a:p>
+            <a:r>
+              <a:rPr lang="en-US" dirty="0"/>
+              <a:t>Possible Errors – 2 - Applying arguments to the wrong thing</a:t>
+            </a:r>
+          </a:p>
+        </p:txBody>
+      </p:sp>
+      <p:sp>
+        <p:nvSpPr>
+          <p:cNvPr id="4" name="TextBox 3">
+            <a:extLst>
+              <a:ext uri="{FF2B5EF4-FFF2-40B4-BE49-F238E27FC236}">
+                <a16:creationId xmlns:a16="http://schemas.microsoft.com/office/drawing/2014/main" id="{25974DE3-08D0-6B3A-D891-60478A79B040}"/>
+              </a:ext>
+            </a:extLst>
+          </p:cNvPr>
+          <p:cNvSpPr txBox="1"/>
+          <p:nvPr/>
+        </p:nvSpPr>
+        <p:spPr>
+          <a:xfrm>
+            <a:off x="1063657" y="1460796"/>
+            <a:ext cx="2482785" cy="276999"/>
+          </a:xfrm>
+          <a:prstGeom prst="rect">
+            <a:avLst/>
+          </a:prstGeom>
+          <a:solidFill>
+            <a:schemeClr val="accent4"/>
+          </a:solidFill>
+          <a:ln>
+            <a:solidFill>
+              <a:schemeClr val="bg1"/>
+            </a:solidFill>
+          </a:ln>
+        </p:spPr>
+        <p:txBody>
+          <a:bodyPr wrap="square" rtlCol="0">
+            <a:spAutoFit/>
+          </a:bodyPr>
+          <a:lstStyle/>
+          <a:p>
+            <a:r>
+              <a:rPr lang="en-US" sz="1200" dirty="0">
+                <a:solidFill>
+                  <a:schemeClr val="bg1"/>
+                </a:solidFill>
+              </a:rPr>
+              <a:t>\x y -&gt; if x &lt; y then -1 else 1 3 4</a:t>
+            </a:r>
+          </a:p>
+        </p:txBody>
+      </p:sp>
+      <p:sp>
+        <p:nvSpPr>
+          <p:cNvPr id="5" name="Multiply 4">
+            <a:extLst>
+              <a:ext uri="{FF2B5EF4-FFF2-40B4-BE49-F238E27FC236}">
+                <a16:creationId xmlns:a16="http://schemas.microsoft.com/office/drawing/2014/main" id="{CBFAF74F-16FA-A4DA-67AE-702B778D6D67}"/>
+              </a:ext>
+            </a:extLst>
+          </p:cNvPr>
+          <p:cNvSpPr/>
+          <p:nvPr/>
+        </p:nvSpPr>
+        <p:spPr>
+          <a:xfrm>
+            <a:off x="3568635" y="1379360"/>
+            <a:ext cx="412815" cy="411237"/>
+          </a:xfrm>
+          <a:prstGeom prst="mathMultiply">
+            <a:avLst/>
+          </a:prstGeom>
+          <a:solidFill>
+            <a:schemeClr val="accent5"/>
+          </a:solidFill>
+        </p:spPr>
+        <p:style>
+          <a:lnRef idx="2">
+            <a:schemeClr val="accent1">
+              <a:shade val="15000"/>
+            </a:schemeClr>
+          </a:lnRef>
+          <a:fillRef idx="1">
+            <a:schemeClr val="accent1"/>
+          </a:fillRef>
+          <a:effectRef idx="0">
+            <a:schemeClr val="accent1"/>
+          </a:effectRef>
+          <a:fontRef idx="minor">
+            <a:schemeClr val="lt1"/>
+          </a:fontRef>
+        </p:style>
+        <p:txBody>
+          <a:bodyPr rtlCol="0" anchor="ctr"/>
+          <a:lstStyle/>
+          <a:p>
+            <a:pPr algn="ctr"/>
+            <a:endParaRPr lang="en-US" dirty="0"/>
+          </a:p>
+        </p:txBody>
+      </p:sp>
+      <p:sp>
+        <p:nvSpPr>
+          <p:cNvPr id="6" name="TextBox 5">
+            <a:extLst>
+              <a:ext uri="{FF2B5EF4-FFF2-40B4-BE49-F238E27FC236}">
+                <a16:creationId xmlns:a16="http://schemas.microsoft.com/office/drawing/2014/main" id="{952C1E34-CD9E-4338-E954-197E86923E96}"/>
+              </a:ext>
+            </a:extLst>
+          </p:cNvPr>
+          <p:cNvSpPr txBox="1"/>
+          <p:nvPr/>
+        </p:nvSpPr>
+        <p:spPr>
+          <a:xfrm>
+            <a:off x="520634" y="1970964"/>
+            <a:ext cx="3841816" cy="553998"/>
+          </a:xfrm>
+          <a:prstGeom prst="rect">
+            <a:avLst/>
+          </a:prstGeom>
+          <a:noFill/>
+        </p:spPr>
+        <p:txBody>
+          <a:bodyPr wrap="square" rtlCol="0">
+            <a:spAutoFit/>
+          </a:bodyPr>
+          <a:lstStyle/>
+          <a:p>
+            <a:r>
+              <a:rPr lang="en-US" sz="1200" dirty="0">
+                <a:solidFill>
+                  <a:schemeClr val="bg1"/>
+                </a:solidFill>
+              </a:rPr>
+              <a:t>What’s wrong? </a:t>
+            </a:r>
+          </a:p>
+          <a:p>
+            <a:r>
+              <a:rPr lang="en-IE" sz="1200" dirty="0">
+                <a:solidFill>
+                  <a:schemeClr val="bg1"/>
+                </a:solidFill>
+              </a:rPr>
+              <a:t>3 and 4 are being applied to 1, not to the lambda</a:t>
+            </a:r>
+            <a:r>
+              <a:rPr lang="en-IE" dirty="0"/>
+              <a:t>.</a:t>
+            </a:r>
+            <a:endParaRPr lang="en-US" sz="1200" dirty="0">
+              <a:solidFill>
+                <a:schemeClr val="bg1"/>
+              </a:solidFill>
+            </a:endParaRPr>
+          </a:p>
+        </p:txBody>
+      </p:sp>
+      <p:sp>
+        <p:nvSpPr>
+          <p:cNvPr id="9" name="TextBox 8">
+            <a:extLst>
+              <a:ext uri="{FF2B5EF4-FFF2-40B4-BE49-F238E27FC236}">
+                <a16:creationId xmlns:a16="http://schemas.microsoft.com/office/drawing/2014/main" id="{50F3CF75-B227-66AA-B333-01C9DA792CF3}"/>
+              </a:ext>
+            </a:extLst>
+          </p:cNvPr>
+          <p:cNvSpPr txBox="1"/>
+          <p:nvPr/>
+        </p:nvSpPr>
+        <p:spPr>
+          <a:xfrm>
+            <a:off x="1003598" y="2936161"/>
+            <a:ext cx="2615317" cy="276999"/>
+          </a:xfrm>
+          <a:prstGeom prst="rect">
+            <a:avLst/>
+          </a:prstGeom>
+          <a:solidFill>
+            <a:schemeClr val="accent4"/>
+          </a:solidFill>
+          <a:ln>
+            <a:solidFill>
+              <a:schemeClr val="bg1"/>
+            </a:solidFill>
+          </a:ln>
+        </p:spPr>
+        <p:txBody>
+          <a:bodyPr wrap="square" rtlCol="0">
+            <a:spAutoFit/>
+          </a:bodyPr>
+          <a:lstStyle/>
+          <a:p>
+            <a:r>
+              <a:rPr lang="en-US" sz="1200" dirty="0">
+                <a:solidFill>
+                  <a:schemeClr val="bg1"/>
+                </a:solidFill>
+              </a:rPr>
+              <a:t>(\x y -&gt; if x &lt; y then -1 else 1) 3 4</a:t>
+            </a:r>
+          </a:p>
+        </p:txBody>
+      </p:sp>
+      <p:sp>
+        <p:nvSpPr>
+          <p:cNvPr id="13" name="TextBox 12">
+            <a:extLst>
+              <a:ext uri="{FF2B5EF4-FFF2-40B4-BE49-F238E27FC236}">
+                <a16:creationId xmlns:a16="http://schemas.microsoft.com/office/drawing/2014/main" id="{1933FF94-8B36-87B3-1688-A317CA475040}"/>
+              </a:ext>
+            </a:extLst>
+          </p:cNvPr>
+          <p:cNvSpPr txBox="1"/>
+          <p:nvPr/>
+        </p:nvSpPr>
+        <p:spPr>
+          <a:xfrm>
+            <a:off x="3618915" y="2889995"/>
+            <a:ext cx="312254" cy="369332"/>
+          </a:xfrm>
+          <a:prstGeom prst="rect">
+            <a:avLst/>
+          </a:prstGeom>
+          <a:noFill/>
+        </p:spPr>
+        <p:txBody>
+          <a:bodyPr wrap="square">
+            <a:spAutoFit/>
+          </a:bodyPr>
+          <a:lstStyle/>
+          <a:p>
+            <a:r>
+              <a:rPr lang="en-IE" b="1" dirty="0">
+                <a:solidFill>
+                  <a:schemeClr val="accent2">
+                    <a:lumMod val="75000"/>
+                  </a:schemeClr>
+                </a:solidFill>
+              </a:rPr>
+              <a:t>✓</a:t>
+            </a:r>
+            <a:endParaRPr lang="en-US" b="1" dirty="0">
+              <a:solidFill>
+                <a:schemeClr val="accent2">
+                  <a:lumMod val="75000"/>
+                </a:schemeClr>
+              </a:solidFill>
+            </a:endParaRPr>
+          </a:p>
+        </p:txBody>
+      </p:sp>
+    </p:spTree>
+    <p:extLst>
+      <p:ext uri="{BB962C8B-B14F-4D97-AF65-F5344CB8AC3E}">
+        <p14:creationId xmlns:p14="http://schemas.microsoft.com/office/powerpoint/2010/main" val="2814820639"/>
+      </p:ext>
+    </p:extLst>
+  </p:cSld>
+  <p:clrMapOvr>
+    <a:masterClrMapping/>
+  </p:clrMapOvr>
+  <p:timing>
+    <p:tnLst>
+      <p:par>
+        <p:cTn id="1" dur="indefinite" restart="never" nodeType="tmRoot">
+          <p:childTnLst>
+            <p:seq concurrent="1" nextAc="seek">
+              <p:cTn id="2" dur="indefinite" nodeType="mainSeq">
+                <p:childTnLst>
+                  <p:par>
+                    <p:cTn id="3" fill="hold">
+                      <p:stCondLst>
+                        <p:cond delay="indefinite"/>
+                      </p:stCondLst>
+                      <p:childTnLst>
+                        <p:par>
+                          <p:cTn id="4" fill="hold">
+                            <p:stCondLst>
+                              <p:cond delay="0"/>
+                            </p:stCondLst>
+                            <p:childTnLst>
+                              <p:par>
+                                <p:cTn id="5" presetID="2" presetClass="entr" presetSubtype="4" fill="hold" grpId="0" nodeType="clickEffect">
+                                  <p:stCondLst>
+                                    <p:cond delay="0"/>
+                                  </p:stCondLst>
+                                  <p:childTnLst>
+                                    <p:set>
+                                      <p:cBhvr>
+                                        <p:cTn id="6" dur="1" fill="hold">
+                                          <p:stCondLst>
+                                            <p:cond delay="0"/>
+                                          </p:stCondLst>
+                                        </p:cTn>
+                                        <p:tgtEl>
+                                          <p:spTgt spid="4"/>
+                                        </p:tgtEl>
+                                        <p:attrNameLst>
+                                          <p:attrName>style.visibility</p:attrName>
+                                        </p:attrNameLst>
+                                      </p:cBhvr>
+                                      <p:to>
+                                        <p:strVal val="visible"/>
+                                      </p:to>
+                                    </p:set>
+                                    <p:anim calcmode="lin" valueType="num">
+                                      <p:cBhvr additive="base">
+                                        <p:cTn id="7" dur="500" fill="hold"/>
+                                        <p:tgtEl>
+                                          <p:spTgt spid="4"/>
+                                        </p:tgtEl>
+                                        <p:attrNameLst>
+                                          <p:attrName>ppt_x</p:attrName>
+                                        </p:attrNameLst>
+                                      </p:cBhvr>
+                                      <p:tavLst>
+                                        <p:tav tm="0">
+                                          <p:val>
+                                            <p:strVal val="#ppt_x"/>
+                                          </p:val>
+                                        </p:tav>
+                                        <p:tav tm="100000">
+                                          <p:val>
+                                            <p:strVal val="#ppt_x"/>
+                                          </p:val>
+                                        </p:tav>
+                                      </p:tavLst>
+                                    </p:anim>
+                                    <p:anim calcmode="lin" valueType="num">
+                                      <p:cBhvr additive="base">
+                                        <p:cTn id="8" dur="500" fill="hold"/>
+                                        <p:tgtEl>
+                                          <p:spTgt spid="4"/>
+                                        </p:tgtEl>
+                                        <p:attrNameLst>
+                                          <p:attrName>ppt_y</p:attrName>
+                                        </p:attrNameLst>
+                                      </p:cBhvr>
+                                      <p:tavLst>
+                                        <p:tav tm="0">
+                                          <p:val>
+                                            <p:strVal val="1+#ppt_h/2"/>
+                                          </p:val>
+                                        </p:tav>
+                                        <p:tav tm="100000">
+                                          <p:val>
+                                            <p:strVal val="#ppt_y"/>
+                                          </p:val>
+                                        </p:tav>
+                                      </p:tavLst>
+                                    </p:anim>
+                                  </p:childTnLst>
+                                </p:cTn>
+                              </p:par>
+                            </p:childTnLst>
+                          </p:cTn>
+                        </p:par>
+                      </p:childTnLst>
+                    </p:cTn>
+                  </p:par>
+                  <p:par>
+                    <p:cTn id="9" fill="hold">
+                      <p:stCondLst>
+                        <p:cond delay="indefinite"/>
+                      </p:stCondLst>
+                      <p:childTnLst>
+                        <p:par>
+                          <p:cTn id="10" fill="hold">
+                            <p:stCondLst>
+                              <p:cond delay="0"/>
+                            </p:stCondLst>
+                            <p:childTnLst>
+                              <p:par>
+                                <p:cTn id="11" presetID="2" presetClass="entr" presetSubtype="4" fill="hold" grpId="0" nodeType="clickEffect">
+                                  <p:stCondLst>
+                                    <p:cond delay="0"/>
+                                  </p:stCondLst>
+                                  <p:childTnLst>
+                                    <p:set>
+                                      <p:cBhvr>
+                                        <p:cTn id="12" dur="1" fill="hold">
+                                          <p:stCondLst>
+                                            <p:cond delay="0"/>
+                                          </p:stCondLst>
+                                        </p:cTn>
+                                        <p:tgtEl>
+                                          <p:spTgt spid="5"/>
+                                        </p:tgtEl>
+                                        <p:attrNameLst>
+                                          <p:attrName>style.visibility</p:attrName>
+                                        </p:attrNameLst>
+                                      </p:cBhvr>
+                                      <p:to>
+                                        <p:strVal val="visible"/>
+                                      </p:to>
+                                    </p:set>
+                                    <p:anim calcmode="lin" valueType="num">
+                                      <p:cBhvr additive="base">
+                                        <p:cTn id="13" dur="500" fill="hold"/>
+                                        <p:tgtEl>
+                                          <p:spTgt spid="5"/>
+                                        </p:tgtEl>
+                                        <p:attrNameLst>
+                                          <p:attrName>ppt_x</p:attrName>
+                                        </p:attrNameLst>
+                                      </p:cBhvr>
+                                      <p:tavLst>
+                                        <p:tav tm="0">
+                                          <p:val>
+                                            <p:strVal val="#ppt_x"/>
+                                          </p:val>
+                                        </p:tav>
+                                        <p:tav tm="100000">
+                                          <p:val>
+                                            <p:strVal val="#ppt_x"/>
+                                          </p:val>
+                                        </p:tav>
+                                      </p:tavLst>
+                                    </p:anim>
+                                    <p:anim calcmode="lin" valueType="num">
+                                      <p:cBhvr additive="base">
+                                        <p:cTn id="14" dur="500" fill="hold"/>
+                                        <p:tgtEl>
+                                          <p:spTgt spid="5"/>
+                                        </p:tgtEl>
+                                        <p:attrNameLst>
+                                          <p:attrName>ppt_y</p:attrName>
+                                        </p:attrNameLst>
+                                      </p:cBhvr>
+                                      <p:tavLst>
+                                        <p:tav tm="0">
+                                          <p:val>
+                                            <p:strVal val="1+#ppt_h/2"/>
+                                          </p:val>
+                                        </p:tav>
+                                        <p:tav tm="100000">
+                                          <p:val>
+                                            <p:strVal val="#ppt_y"/>
+                                          </p:val>
+                                        </p:tav>
+                                      </p:tavLst>
+                                    </p:anim>
+                                  </p:childTnLst>
+                                </p:cTn>
+                              </p:par>
+                            </p:childTnLst>
+                          </p:cTn>
+                        </p:par>
+                      </p:childTnLst>
+                    </p:cTn>
+                  </p:par>
+                  <p:par>
+                    <p:cTn id="15" fill="hold">
+                      <p:stCondLst>
+                        <p:cond delay="indefinite"/>
+                      </p:stCondLst>
+                      <p:childTnLst>
+                        <p:par>
+                          <p:cTn id="16" fill="hold">
+                            <p:stCondLst>
+                              <p:cond delay="0"/>
+                            </p:stCondLst>
+                            <p:childTnLst>
+                              <p:par>
+                                <p:cTn id="17" presetID="2" presetClass="entr" presetSubtype="4" fill="hold" nodeType="clickEffect">
+                                  <p:stCondLst>
+                                    <p:cond delay="0"/>
+                                  </p:stCondLst>
+                                  <p:childTnLst>
+                                    <p:set>
+                                      <p:cBhvr>
+                                        <p:cTn id="18" dur="1" fill="hold">
+                                          <p:stCondLst>
+                                            <p:cond delay="0"/>
+                                          </p:stCondLst>
+                                        </p:cTn>
+                                        <p:tgtEl>
+                                          <p:spTgt spid="6">
+                                            <p:txEl>
+                                              <p:pRg st="0" end="0"/>
+                                            </p:txEl>
+                                          </p:spTgt>
+                                        </p:tgtEl>
+                                        <p:attrNameLst>
+                                          <p:attrName>style.visibility</p:attrName>
+                                        </p:attrNameLst>
+                                      </p:cBhvr>
+                                      <p:to>
+                                        <p:strVal val="visible"/>
+                                      </p:to>
+                                    </p:set>
+                                    <p:anim calcmode="lin" valueType="num">
+                                      <p:cBhvr additive="base">
+                                        <p:cTn id="19" dur="500" fill="hold"/>
+                                        <p:tgtEl>
+                                          <p:spTgt spid="6">
+                                            <p:txEl>
+                                              <p:pRg st="0" end="0"/>
+                                            </p:txEl>
+                                          </p:spTgt>
+                                        </p:tgtEl>
+                                        <p:attrNameLst>
+                                          <p:attrName>ppt_x</p:attrName>
+                                        </p:attrNameLst>
+                                      </p:cBhvr>
+                                      <p:tavLst>
+                                        <p:tav tm="0">
+                                          <p:val>
+                                            <p:strVal val="#ppt_x"/>
+                                          </p:val>
+                                        </p:tav>
+                                        <p:tav tm="100000">
+                                          <p:val>
+                                            <p:strVal val="#ppt_x"/>
+                                          </p:val>
+                                        </p:tav>
+                                      </p:tavLst>
+                                    </p:anim>
+                                    <p:anim calcmode="lin" valueType="num">
+                                      <p:cBhvr additive="base">
+                                        <p:cTn id="20" dur="500" fill="hold"/>
+                                        <p:tgtEl>
+                                          <p:spTgt spid="6">
+                                            <p:txEl>
+                                              <p:pRg st="0" end="0"/>
+                                            </p:txEl>
+                                          </p:spTgt>
+                                        </p:tgtEl>
+                                        <p:attrNameLst>
+                                          <p:attrName>ppt_y</p:attrName>
+                                        </p:attrNameLst>
+                                      </p:cBhvr>
+                                      <p:tavLst>
+                                        <p:tav tm="0">
+                                          <p:val>
+                                            <p:strVal val="1+#ppt_h/2"/>
+                                          </p:val>
+                                        </p:tav>
+                                        <p:tav tm="100000">
+                                          <p:val>
+                                            <p:strVal val="#ppt_y"/>
+                                          </p:val>
+                                        </p:tav>
+                                      </p:tavLst>
+                                    </p:anim>
+                                  </p:childTnLst>
+                                </p:cTn>
+                              </p:par>
+                            </p:childTnLst>
+                          </p:cTn>
+                        </p:par>
+                      </p:childTnLst>
+                    </p:cTn>
+                  </p:par>
+                  <p:par>
+                    <p:cTn id="21" fill="hold">
+                      <p:stCondLst>
+                        <p:cond delay="indefinite"/>
+                      </p:stCondLst>
+                      <p:childTnLst>
+                        <p:par>
+                          <p:cTn id="22" fill="hold">
+                            <p:stCondLst>
+                              <p:cond delay="0"/>
+                            </p:stCondLst>
+                            <p:childTnLst>
+                              <p:par>
+                                <p:cTn id="23" presetID="2" presetClass="entr" presetSubtype="4" fill="hold" grpId="0" nodeType="clickEffect">
+                                  <p:stCondLst>
+                                    <p:cond delay="0"/>
+                                  </p:stCondLst>
+                                  <p:childTnLst>
+                                    <p:set>
+                                      <p:cBhvr>
+                                        <p:cTn id="24" dur="1" fill="hold">
+                                          <p:stCondLst>
+                                            <p:cond delay="0"/>
+                                          </p:stCondLst>
+                                        </p:cTn>
+                                        <p:tgtEl>
+                                          <p:spTgt spid="9"/>
+                                        </p:tgtEl>
+                                        <p:attrNameLst>
+                                          <p:attrName>style.visibility</p:attrName>
+                                        </p:attrNameLst>
+                                      </p:cBhvr>
+                                      <p:to>
+                                        <p:strVal val="visible"/>
+                                      </p:to>
+                                    </p:set>
+                                    <p:anim calcmode="lin" valueType="num">
+                                      <p:cBhvr additive="base">
+                                        <p:cTn id="25" dur="500" fill="hold"/>
+                                        <p:tgtEl>
+                                          <p:spTgt spid="9"/>
+                                        </p:tgtEl>
+                                        <p:attrNameLst>
+                                          <p:attrName>ppt_x</p:attrName>
+                                        </p:attrNameLst>
+                                      </p:cBhvr>
+                                      <p:tavLst>
+                                        <p:tav tm="0">
+                                          <p:val>
+                                            <p:strVal val="#ppt_x"/>
+                                          </p:val>
+                                        </p:tav>
+                                        <p:tav tm="100000">
+                                          <p:val>
+                                            <p:strVal val="#ppt_x"/>
+                                          </p:val>
+                                        </p:tav>
+                                      </p:tavLst>
+                                    </p:anim>
+                                    <p:anim calcmode="lin" valueType="num">
+                                      <p:cBhvr additive="base">
+                                        <p:cTn id="26" dur="500" fill="hold"/>
+                                        <p:tgtEl>
+                                          <p:spTgt spid="9"/>
+                                        </p:tgtEl>
+                                        <p:attrNameLst>
+                                          <p:attrName>ppt_y</p:attrName>
+                                        </p:attrNameLst>
+                                      </p:cBhvr>
+                                      <p:tavLst>
+                                        <p:tav tm="0">
+                                          <p:val>
+                                            <p:strVal val="1+#ppt_h/2"/>
+                                          </p:val>
+                                        </p:tav>
+                                        <p:tav tm="100000">
+                                          <p:val>
+                                            <p:strVal val="#ppt_y"/>
+                                          </p:val>
+                                        </p:tav>
+                                      </p:tavLst>
+                                    </p:anim>
+                                  </p:childTnLst>
+                                </p:cTn>
+                              </p:par>
+                            </p:childTnLst>
+                          </p:cTn>
+                        </p:par>
+                      </p:childTnLst>
+                    </p:cTn>
+                  </p:par>
+                  <p:par>
+                    <p:cTn id="27" fill="hold">
+                      <p:stCondLst>
+                        <p:cond delay="indefinite"/>
+                      </p:stCondLst>
+                      <p:childTnLst>
+                        <p:par>
+                          <p:cTn id="28" fill="hold">
+                            <p:stCondLst>
+                              <p:cond delay="0"/>
+                            </p:stCondLst>
+                            <p:childTnLst>
+                              <p:par>
+                                <p:cTn id="29" presetID="2" presetClass="entr" presetSubtype="4" fill="hold" grpId="0" nodeType="clickEffect">
+                                  <p:stCondLst>
+                                    <p:cond delay="0"/>
+                                  </p:stCondLst>
+                                  <p:childTnLst>
+                                    <p:set>
+                                      <p:cBhvr>
+                                        <p:cTn id="30" dur="1" fill="hold">
+                                          <p:stCondLst>
+                                            <p:cond delay="0"/>
+                                          </p:stCondLst>
+                                        </p:cTn>
+                                        <p:tgtEl>
+                                          <p:spTgt spid="13"/>
+                                        </p:tgtEl>
+                                        <p:attrNameLst>
+                                          <p:attrName>style.visibility</p:attrName>
+                                        </p:attrNameLst>
+                                      </p:cBhvr>
+                                      <p:to>
+                                        <p:strVal val="visible"/>
+                                      </p:to>
+                                    </p:set>
+                                    <p:anim calcmode="lin" valueType="num">
+                                      <p:cBhvr additive="base">
+                                        <p:cTn id="31" dur="500" fill="hold"/>
+                                        <p:tgtEl>
+                                          <p:spTgt spid="13"/>
+                                        </p:tgtEl>
+                                        <p:attrNameLst>
+                                          <p:attrName>ppt_x</p:attrName>
+                                        </p:attrNameLst>
+                                      </p:cBhvr>
+                                      <p:tavLst>
+                                        <p:tav tm="0">
+                                          <p:val>
+                                            <p:strVal val="#ppt_x"/>
+                                          </p:val>
+                                        </p:tav>
+                                        <p:tav tm="100000">
+                                          <p:val>
+                                            <p:strVal val="#ppt_x"/>
+                                          </p:val>
+                                        </p:tav>
+                                      </p:tavLst>
+                                    </p:anim>
+                                    <p:anim calcmode="lin" valueType="num">
+                                      <p:cBhvr additive="base">
+                                        <p:cTn id="32" dur="500" fill="hold"/>
+                                        <p:tgtEl>
+                                          <p:spTgt spid="13"/>
+                                        </p:tgtEl>
+                                        <p:attrNameLst>
+                                          <p:attrName>ppt_y</p:attrName>
+                                        </p:attrNameLst>
+                                      </p:cBhvr>
+                                      <p:tavLst>
+                                        <p:tav tm="0">
+                                          <p:val>
+                                            <p:strVal val="1+#ppt_h/2"/>
+                                          </p:val>
+                                        </p:tav>
+                                        <p:tav tm="100000">
+                                          <p:val>
+                                            <p:strVal val="#ppt_y"/>
+                                          </p:val>
+                                        </p:tav>
+                                      </p:tavLst>
+                                    </p:anim>
+                                  </p:childTnLst>
+                                </p:cTn>
+                              </p:par>
+                            </p:childTnLst>
+                          </p:cTn>
+                        </p:par>
+                      </p:childTnLst>
+                    </p:cTn>
+                  </p:par>
+                  <p:par>
+                    <p:cTn id="33" fill="hold">
+                      <p:stCondLst>
+                        <p:cond delay="indefinite"/>
+                      </p:stCondLst>
+                      <p:childTnLst>
+                        <p:par>
+                          <p:cTn id="34" fill="hold">
+                            <p:stCondLst>
+                              <p:cond delay="0"/>
+                            </p:stCondLst>
+                            <p:childTnLst>
+                              <p:par>
+                                <p:cTn id="35" presetID="2" presetClass="entr" presetSubtype="4" fill="hold" nodeType="clickEffect">
+                                  <p:stCondLst>
+                                    <p:cond delay="0"/>
+                                  </p:stCondLst>
+                                  <p:childTnLst>
+                                    <p:set>
+                                      <p:cBhvr>
+                                        <p:cTn id="36" dur="1" fill="hold">
+                                          <p:stCondLst>
+                                            <p:cond delay="0"/>
+                                          </p:stCondLst>
+                                        </p:cTn>
+                                        <p:tgtEl>
+                                          <p:spTgt spid="6">
+                                            <p:txEl>
+                                              <p:charRg st="15" end="66"/>
+                                            </p:txEl>
+                                          </p:spTgt>
+                                        </p:tgtEl>
+                                        <p:attrNameLst>
+                                          <p:attrName>style.visibility</p:attrName>
+                                        </p:attrNameLst>
+                                      </p:cBhvr>
+                                      <p:to>
+                                        <p:strVal val="visible"/>
+                                      </p:to>
+                                    </p:set>
+                                    <p:anim calcmode="lin" valueType="num">
+                                      <p:cBhvr additive="base">
+                                        <p:cTn id="37" dur="500" fill="hold"/>
+                                        <p:tgtEl>
+                                          <p:spTgt spid="6">
+                                            <p:txEl>
+                                              <p:charRg st="15" end="66"/>
+                                            </p:txEl>
+                                          </p:spTgt>
+                                        </p:tgtEl>
+                                        <p:attrNameLst>
+                                          <p:attrName>ppt_x</p:attrName>
+                                        </p:attrNameLst>
+                                      </p:cBhvr>
+                                      <p:tavLst>
+                                        <p:tav tm="0">
+                                          <p:val>
+                                            <p:strVal val="#ppt_x"/>
+                                          </p:val>
+                                        </p:tav>
+                                        <p:tav tm="100000">
+                                          <p:val>
+                                            <p:strVal val="#ppt_x"/>
+                                          </p:val>
+                                        </p:tav>
+                                      </p:tavLst>
+                                    </p:anim>
+                                    <p:anim calcmode="lin" valueType="num">
+                                      <p:cBhvr additive="base">
+                                        <p:cTn id="38" dur="500" fill="hold"/>
+                                        <p:tgtEl>
+                                          <p:spTgt spid="6">
+                                            <p:txEl>
+                                              <p:charRg st="15" end="66"/>
+                                            </p:txEl>
+                                          </p:spTgt>
+                                        </p:tgtEl>
+                                        <p:attrNameLst>
+                                          <p:attrName>ppt_y</p:attrName>
+                                        </p:attrNameLst>
+                                      </p:cBhvr>
+                                      <p:tavLst>
+                                        <p:tav tm="0">
+                                          <p:val>
+                                            <p:strVal val="1+#ppt_h/2"/>
+                                          </p:val>
+                                        </p:tav>
+                                        <p:tav tm="100000">
+                                          <p:val>
+                                            <p:strVal val="#ppt_y"/>
+                                          </p:val>
+                                        </p:tav>
+                                      </p:tavLst>
+                                    </p:anim>
+                                  </p:childTnLst>
+                                </p:cTn>
+                              </p:par>
+                            </p:childTnLst>
+                          </p:cTn>
+                        </p:par>
+                      </p:childTnLst>
+                    </p:cTn>
+                  </p:par>
+                </p:childTnLst>
+              </p:cTn>
+              <p:prevCondLst>
+                <p:cond evt="onPrev" delay="0">
+                  <p:tgtEl>
+                    <p:sldTgt/>
+                  </p:tgtEl>
+                </p:cond>
+              </p:prevCondLst>
+              <p:nextCondLst>
+                <p:cond evt="onNext" delay="0">
+                  <p:tgtEl>
+                    <p:sldTgt/>
+                  </p:tgtEl>
+                </p:cond>
+              </p:nextCondLst>
+            </p:seq>
+          </p:childTnLst>
+        </p:cTn>
+      </p:par>
+    </p:tnLst>
+    <p:bldLst>
+      <p:bldP spid="4" grpId="0" animBg="1"/>
+      <p:bldP spid="5" grpId="0" animBg="1"/>
+      <p:bldP spid="9" grpId="0" animBg="1"/>
+      <p:bldP spid="13" grpId="0"/>
+    </p:bldLst>
+  </p:timing>
+</p:sld>
+</file>
+
+<file path=ppt/slides/slide19.xml><?xml version="1.0" encoding="utf-8"?>
+<p:sld xmlns:a="http://schemas.openxmlformats.org/drawingml/2006/main" xmlns:r="http://schemas.openxmlformats.org/officeDocument/2006/relationships" xmlns:p="http://schemas.openxmlformats.org/presentationml/2006/main">
+  <p:cSld>
+    <p:spTree>
+      <p:nvGrpSpPr>
+        <p:cNvPr id="1" name="">
+          <a:extLst>
+            <a:ext uri="{FF2B5EF4-FFF2-40B4-BE49-F238E27FC236}">
+              <a16:creationId xmlns:a16="http://schemas.microsoft.com/office/drawing/2014/main" id="{4232728D-C2E6-A08B-1E46-4587F75C0879}"/>
+            </a:ext>
+          </a:extLst>
+        </p:cNvPr>
+        <p:cNvGrpSpPr/>
+        <p:nvPr/>
+      </p:nvGrpSpPr>
+      <p:grpSpPr>
+        <a:xfrm>
+          <a:off x="0" y="0"/>
+          <a:ext cx="0" cy="0"/>
+          <a:chOff x="0" y="0"/>
+          <a:chExt cx="0" cy="0"/>
+        </a:xfrm>
+      </p:grpSpPr>
+      <p:sp>
+        <p:nvSpPr>
+          <p:cNvPr id="2" name="Title 1">
+            <a:extLst>
+              <a:ext uri="{FF2B5EF4-FFF2-40B4-BE49-F238E27FC236}">
+                <a16:creationId xmlns:a16="http://schemas.microsoft.com/office/drawing/2014/main" id="{09DFB710-3178-241A-C1C1-EB27C4AA04B9}"/>
+              </a:ext>
+            </a:extLst>
+          </p:cNvPr>
+          <p:cNvSpPr>
+            <a:spLocks noGrp="1"/>
+          </p:cNvSpPr>
+          <p:nvPr>
+            <p:ph type="title"/>
+          </p:nvPr>
+        </p:nvSpPr>
+        <p:spPr/>
+        <p:txBody>
+          <a:bodyPr>
+            <a:normAutofit fontScale="90000"/>
+          </a:bodyPr>
+          <a:lstStyle/>
+          <a:p>
+            <a:r>
+              <a:rPr lang="en-US" dirty="0"/>
+              <a:t>Possible Errors – 3 - </a:t>
+            </a:r>
+            <a:r>
+              <a:rPr lang="en-IE" dirty="0"/>
+              <a:t>Forgetting lambdas bind one variable</a:t>
+            </a:r>
+            <a:endParaRPr lang="en-US" dirty="0"/>
+          </a:p>
+        </p:txBody>
+      </p:sp>
+      <p:sp>
+        <p:nvSpPr>
+          <p:cNvPr id="4" name="TextBox 3">
+            <a:extLst>
+              <a:ext uri="{FF2B5EF4-FFF2-40B4-BE49-F238E27FC236}">
+                <a16:creationId xmlns:a16="http://schemas.microsoft.com/office/drawing/2014/main" id="{7F8A4670-2421-9585-2E41-76EDC584E20B}"/>
+              </a:ext>
+            </a:extLst>
+          </p:cNvPr>
+          <p:cNvSpPr txBox="1"/>
+          <p:nvPr/>
+        </p:nvSpPr>
+        <p:spPr>
+          <a:xfrm>
+            <a:off x="1423938" y="1488365"/>
+            <a:ext cx="1165193" cy="276999"/>
+          </a:xfrm>
+          <a:prstGeom prst="rect">
+            <a:avLst/>
+          </a:prstGeom>
+          <a:solidFill>
+            <a:schemeClr val="accent4"/>
+          </a:solidFill>
+          <a:ln>
+            <a:solidFill>
+              <a:schemeClr val="bg1"/>
+            </a:solidFill>
+          </a:ln>
+        </p:spPr>
+        <p:txBody>
+          <a:bodyPr wrap="square" rtlCol="0">
+            <a:spAutoFit/>
+          </a:bodyPr>
+          <a:lstStyle/>
+          <a:p>
+            <a:r>
+              <a:rPr lang="en-US" sz="1200" dirty="0">
+                <a:solidFill>
+                  <a:schemeClr val="bg1"/>
+                </a:solidFill>
+              </a:rPr>
+              <a:t>\</a:t>
+            </a:r>
+            <a:r>
+              <a:rPr lang="en-US" sz="1200" dirty="0" err="1">
+                <a:solidFill>
+                  <a:schemeClr val="bg1"/>
+                </a:solidFill>
+              </a:rPr>
+              <a:t>xy</a:t>
+            </a:r>
+            <a:r>
+              <a:rPr lang="en-US" sz="1200" dirty="0">
+                <a:solidFill>
+                  <a:schemeClr val="bg1"/>
+                </a:solidFill>
+              </a:rPr>
+              <a:t> -&gt; x + y</a:t>
+            </a:r>
+          </a:p>
+        </p:txBody>
+      </p:sp>
+      <p:sp>
+        <p:nvSpPr>
+          <p:cNvPr id="5" name="Multiply 4">
+            <a:extLst>
+              <a:ext uri="{FF2B5EF4-FFF2-40B4-BE49-F238E27FC236}">
+                <a16:creationId xmlns:a16="http://schemas.microsoft.com/office/drawing/2014/main" id="{8A5FDA7B-45CA-1566-16B1-D72AC7CB99DE}"/>
+              </a:ext>
+            </a:extLst>
+          </p:cNvPr>
+          <p:cNvSpPr/>
+          <p:nvPr/>
+        </p:nvSpPr>
+        <p:spPr>
+          <a:xfrm>
+            <a:off x="2762250" y="1421245"/>
+            <a:ext cx="412815" cy="411237"/>
+          </a:xfrm>
+          <a:prstGeom prst="mathMultiply">
+            <a:avLst/>
+          </a:prstGeom>
+          <a:solidFill>
+            <a:schemeClr val="accent5"/>
+          </a:solidFill>
+        </p:spPr>
+        <p:style>
+          <a:lnRef idx="2">
+            <a:schemeClr val="accent1">
+              <a:shade val="15000"/>
+            </a:schemeClr>
+          </a:lnRef>
+          <a:fillRef idx="1">
+            <a:schemeClr val="accent1"/>
+          </a:fillRef>
+          <a:effectRef idx="0">
+            <a:schemeClr val="accent1"/>
+          </a:effectRef>
+          <a:fontRef idx="minor">
+            <a:schemeClr val="lt1"/>
+          </a:fontRef>
+        </p:style>
+        <p:txBody>
+          <a:bodyPr rtlCol="0" anchor="ctr"/>
+          <a:lstStyle/>
+          <a:p>
+            <a:pPr algn="ctr"/>
+            <a:endParaRPr lang="en-US" dirty="0"/>
+          </a:p>
+        </p:txBody>
+      </p:sp>
+      <p:sp>
+        <p:nvSpPr>
+          <p:cNvPr id="6" name="TextBox 5">
+            <a:extLst>
+              <a:ext uri="{FF2B5EF4-FFF2-40B4-BE49-F238E27FC236}">
+                <a16:creationId xmlns:a16="http://schemas.microsoft.com/office/drawing/2014/main" id="{B811281D-600A-B024-2BD5-14C16B8C8556}"/>
+              </a:ext>
+            </a:extLst>
+          </p:cNvPr>
+          <p:cNvSpPr txBox="1"/>
+          <p:nvPr/>
+        </p:nvSpPr>
+        <p:spPr>
+          <a:xfrm>
+            <a:off x="520634" y="1970964"/>
+            <a:ext cx="3841816" cy="461665"/>
+          </a:xfrm>
+          <a:prstGeom prst="rect">
+            <a:avLst/>
+          </a:prstGeom>
+          <a:noFill/>
+        </p:spPr>
+        <p:txBody>
+          <a:bodyPr wrap="square" rtlCol="0">
+            <a:spAutoFit/>
+          </a:bodyPr>
+          <a:lstStyle/>
+          <a:p>
+            <a:r>
+              <a:rPr lang="en-US" sz="1200" dirty="0">
+                <a:solidFill>
+                  <a:schemeClr val="bg1"/>
+                </a:solidFill>
+              </a:rPr>
+              <a:t>What’s wrong? </a:t>
+            </a:r>
+          </a:p>
+          <a:p>
+            <a:r>
+              <a:rPr lang="en-IE" sz="1200" dirty="0" err="1">
+                <a:solidFill>
+                  <a:schemeClr val="bg1"/>
+                </a:solidFill>
+              </a:rPr>
+              <a:t>xy</a:t>
+            </a:r>
+            <a:r>
+              <a:rPr lang="en-IE" sz="1200" dirty="0">
+                <a:solidFill>
+                  <a:schemeClr val="bg1"/>
+                </a:solidFill>
+              </a:rPr>
+              <a:t> is a single variable name</a:t>
+            </a:r>
+            <a:endParaRPr lang="en-US" sz="1200" dirty="0">
+              <a:solidFill>
+                <a:schemeClr val="bg1"/>
+              </a:solidFill>
+            </a:endParaRPr>
+          </a:p>
+        </p:txBody>
+      </p:sp>
+      <p:sp>
+        <p:nvSpPr>
+          <p:cNvPr id="9" name="TextBox 8">
+            <a:extLst>
+              <a:ext uri="{FF2B5EF4-FFF2-40B4-BE49-F238E27FC236}">
+                <a16:creationId xmlns:a16="http://schemas.microsoft.com/office/drawing/2014/main" id="{0579F664-0F42-34A1-4816-B55C1465148F}"/>
+              </a:ext>
+            </a:extLst>
+          </p:cNvPr>
+          <p:cNvSpPr txBox="1"/>
+          <p:nvPr/>
+        </p:nvSpPr>
+        <p:spPr>
+          <a:xfrm>
+            <a:off x="1423938" y="2936161"/>
+            <a:ext cx="1072852" cy="276999"/>
+          </a:xfrm>
+          <a:prstGeom prst="rect">
+            <a:avLst/>
+          </a:prstGeom>
+          <a:solidFill>
+            <a:schemeClr val="accent4"/>
+          </a:solidFill>
+          <a:ln>
+            <a:solidFill>
+              <a:schemeClr val="bg1"/>
+            </a:solidFill>
+          </a:ln>
+        </p:spPr>
+        <p:txBody>
+          <a:bodyPr wrap="square" rtlCol="0">
+            <a:spAutoFit/>
+          </a:bodyPr>
+          <a:lstStyle/>
+          <a:p>
+            <a:r>
+              <a:rPr lang="en-US" sz="1200" dirty="0">
+                <a:solidFill>
+                  <a:schemeClr val="bg1"/>
+                </a:solidFill>
+              </a:rPr>
+              <a:t>\x y -&gt; x + y</a:t>
+            </a:r>
+          </a:p>
+        </p:txBody>
+      </p:sp>
+      <p:sp>
+        <p:nvSpPr>
+          <p:cNvPr id="13" name="TextBox 12">
+            <a:extLst>
+              <a:ext uri="{FF2B5EF4-FFF2-40B4-BE49-F238E27FC236}">
+                <a16:creationId xmlns:a16="http://schemas.microsoft.com/office/drawing/2014/main" id="{21D1589B-F362-899C-B198-30D41F0450BD}"/>
+              </a:ext>
+            </a:extLst>
+          </p:cNvPr>
+          <p:cNvSpPr txBox="1"/>
+          <p:nvPr/>
+        </p:nvSpPr>
+        <p:spPr>
+          <a:xfrm>
+            <a:off x="2812530" y="2877872"/>
+            <a:ext cx="312254" cy="369332"/>
+          </a:xfrm>
+          <a:prstGeom prst="rect">
+            <a:avLst/>
+          </a:prstGeom>
+          <a:noFill/>
+        </p:spPr>
+        <p:txBody>
+          <a:bodyPr wrap="square">
+            <a:spAutoFit/>
+          </a:bodyPr>
+          <a:lstStyle/>
+          <a:p>
+            <a:r>
+              <a:rPr lang="en-IE" b="1" dirty="0">
+                <a:solidFill>
+                  <a:schemeClr val="accent2">
+                    <a:lumMod val="75000"/>
+                  </a:schemeClr>
+                </a:solidFill>
+              </a:rPr>
+              <a:t>✓</a:t>
+            </a:r>
+            <a:endParaRPr lang="en-US" b="1" dirty="0">
+              <a:solidFill>
+                <a:schemeClr val="accent2">
+                  <a:lumMod val="75000"/>
+                </a:schemeClr>
+              </a:solidFill>
+            </a:endParaRPr>
+          </a:p>
+        </p:txBody>
+      </p:sp>
+    </p:spTree>
+    <p:extLst>
+      <p:ext uri="{BB962C8B-B14F-4D97-AF65-F5344CB8AC3E}">
+        <p14:creationId xmlns:p14="http://schemas.microsoft.com/office/powerpoint/2010/main" val="986012955"/>
+      </p:ext>
+    </p:extLst>
+  </p:cSld>
+  <p:clrMapOvr>
+    <a:masterClrMapping/>
+  </p:clrMapOvr>
+  <p:timing>
+    <p:tnLst>
+      <p:par>
+        <p:cTn id="1" dur="indefinite" restart="never" nodeType="tmRoot">
+          <p:childTnLst>
+            <p:seq concurrent="1" nextAc="seek">
+              <p:cTn id="2" dur="indefinite" nodeType="mainSeq">
+                <p:childTnLst>
+                  <p:par>
+                    <p:cTn id="3" fill="hold">
+                      <p:stCondLst>
+                        <p:cond delay="indefinite"/>
+                      </p:stCondLst>
+                      <p:childTnLst>
+                        <p:par>
+                          <p:cTn id="4" fill="hold">
+                            <p:stCondLst>
+                              <p:cond delay="0"/>
+                            </p:stCondLst>
+                            <p:childTnLst>
+                              <p:par>
+                                <p:cTn id="5" presetID="2" presetClass="entr" presetSubtype="4" fill="hold" grpId="0" nodeType="clickEffect">
+                                  <p:stCondLst>
+                                    <p:cond delay="0"/>
+                                  </p:stCondLst>
+                                  <p:childTnLst>
+                                    <p:set>
+                                      <p:cBhvr>
+                                        <p:cTn id="6" dur="1" fill="hold">
+                                          <p:stCondLst>
+                                            <p:cond delay="0"/>
+                                          </p:stCondLst>
+                                        </p:cTn>
+                                        <p:tgtEl>
+                                          <p:spTgt spid="4"/>
+                                        </p:tgtEl>
+                                        <p:attrNameLst>
+                                          <p:attrName>style.visibility</p:attrName>
+                                        </p:attrNameLst>
+                                      </p:cBhvr>
+                                      <p:to>
+                                        <p:strVal val="visible"/>
+                                      </p:to>
+                                    </p:set>
+                                    <p:anim calcmode="lin" valueType="num">
+                                      <p:cBhvr additive="base">
+                                        <p:cTn id="7" dur="500" fill="hold"/>
+                                        <p:tgtEl>
+                                          <p:spTgt spid="4"/>
+                                        </p:tgtEl>
+                                        <p:attrNameLst>
+                                          <p:attrName>ppt_x</p:attrName>
+                                        </p:attrNameLst>
+                                      </p:cBhvr>
+                                      <p:tavLst>
+                                        <p:tav tm="0">
+                                          <p:val>
+                                            <p:strVal val="#ppt_x"/>
+                                          </p:val>
+                                        </p:tav>
+                                        <p:tav tm="100000">
+                                          <p:val>
+                                            <p:strVal val="#ppt_x"/>
+                                          </p:val>
+                                        </p:tav>
+                                      </p:tavLst>
+                                    </p:anim>
+                                    <p:anim calcmode="lin" valueType="num">
+                                      <p:cBhvr additive="base">
+                                        <p:cTn id="8" dur="500" fill="hold"/>
+                                        <p:tgtEl>
+                                          <p:spTgt spid="4"/>
+                                        </p:tgtEl>
+                                        <p:attrNameLst>
+                                          <p:attrName>ppt_y</p:attrName>
+                                        </p:attrNameLst>
+                                      </p:cBhvr>
+                                      <p:tavLst>
+                                        <p:tav tm="0">
+                                          <p:val>
+                                            <p:strVal val="1+#ppt_h/2"/>
+                                          </p:val>
+                                        </p:tav>
+                                        <p:tav tm="100000">
+                                          <p:val>
+                                            <p:strVal val="#ppt_y"/>
+                                          </p:val>
+                                        </p:tav>
+                                      </p:tavLst>
+                                    </p:anim>
+                                  </p:childTnLst>
+                                </p:cTn>
+                              </p:par>
+                            </p:childTnLst>
+                          </p:cTn>
+                        </p:par>
+                      </p:childTnLst>
+                    </p:cTn>
+                  </p:par>
+                  <p:par>
+                    <p:cTn id="9" fill="hold">
+                      <p:stCondLst>
+                        <p:cond delay="indefinite"/>
+                      </p:stCondLst>
+                      <p:childTnLst>
+                        <p:par>
+                          <p:cTn id="10" fill="hold">
+                            <p:stCondLst>
+                              <p:cond delay="0"/>
+                            </p:stCondLst>
+                            <p:childTnLst>
+                              <p:par>
+                                <p:cTn id="11" presetID="2" presetClass="entr" presetSubtype="4" fill="hold" grpId="0" nodeType="clickEffect">
+                                  <p:stCondLst>
+                                    <p:cond delay="0"/>
+                                  </p:stCondLst>
+                                  <p:childTnLst>
+                                    <p:set>
+                                      <p:cBhvr>
+                                        <p:cTn id="12" dur="1" fill="hold">
+                                          <p:stCondLst>
+                                            <p:cond delay="0"/>
+                                          </p:stCondLst>
+                                        </p:cTn>
+                                        <p:tgtEl>
+                                          <p:spTgt spid="5"/>
+                                        </p:tgtEl>
+                                        <p:attrNameLst>
+                                          <p:attrName>style.visibility</p:attrName>
+                                        </p:attrNameLst>
+                                      </p:cBhvr>
+                                      <p:to>
+                                        <p:strVal val="visible"/>
+                                      </p:to>
+                                    </p:set>
+                                    <p:anim calcmode="lin" valueType="num">
+                                      <p:cBhvr additive="base">
+                                        <p:cTn id="13" dur="500" fill="hold"/>
+                                        <p:tgtEl>
+                                          <p:spTgt spid="5"/>
+                                        </p:tgtEl>
+                                        <p:attrNameLst>
+                                          <p:attrName>ppt_x</p:attrName>
+                                        </p:attrNameLst>
+                                      </p:cBhvr>
+                                      <p:tavLst>
+                                        <p:tav tm="0">
+                                          <p:val>
+                                            <p:strVal val="#ppt_x"/>
+                                          </p:val>
+                                        </p:tav>
+                                        <p:tav tm="100000">
+                                          <p:val>
+                                            <p:strVal val="#ppt_x"/>
+                                          </p:val>
+                                        </p:tav>
+                                      </p:tavLst>
+                                    </p:anim>
+                                    <p:anim calcmode="lin" valueType="num">
+                                      <p:cBhvr additive="base">
+                                        <p:cTn id="14" dur="500" fill="hold"/>
+                                        <p:tgtEl>
+                                          <p:spTgt spid="5"/>
+                                        </p:tgtEl>
+                                        <p:attrNameLst>
+                                          <p:attrName>ppt_y</p:attrName>
+                                        </p:attrNameLst>
+                                      </p:cBhvr>
+                                      <p:tavLst>
+                                        <p:tav tm="0">
+                                          <p:val>
+                                            <p:strVal val="1+#ppt_h/2"/>
+                                          </p:val>
+                                        </p:tav>
+                                        <p:tav tm="100000">
+                                          <p:val>
+                                            <p:strVal val="#ppt_y"/>
+                                          </p:val>
+                                        </p:tav>
+                                      </p:tavLst>
+                                    </p:anim>
+                                  </p:childTnLst>
+                                </p:cTn>
+                              </p:par>
+                            </p:childTnLst>
+                          </p:cTn>
+                        </p:par>
+                      </p:childTnLst>
+                    </p:cTn>
+                  </p:par>
+                  <p:par>
+                    <p:cTn id="15" fill="hold">
+                      <p:stCondLst>
+                        <p:cond delay="indefinite"/>
+                      </p:stCondLst>
+                      <p:childTnLst>
+                        <p:par>
+                          <p:cTn id="16" fill="hold">
+                            <p:stCondLst>
+                              <p:cond delay="0"/>
+                            </p:stCondLst>
+                            <p:childTnLst>
+                              <p:par>
+                                <p:cTn id="17" presetID="2" presetClass="entr" presetSubtype="4" fill="hold" nodeType="clickEffect">
+                                  <p:stCondLst>
+                                    <p:cond delay="0"/>
+                                  </p:stCondLst>
+                                  <p:childTnLst>
+                                    <p:set>
+                                      <p:cBhvr>
+                                        <p:cTn id="18" dur="1" fill="hold">
+                                          <p:stCondLst>
+                                            <p:cond delay="0"/>
+                                          </p:stCondLst>
+                                        </p:cTn>
+                                        <p:tgtEl>
+                                          <p:spTgt spid="6">
+                                            <p:txEl>
+                                              <p:pRg st="0" end="0"/>
+                                            </p:txEl>
+                                          </p:spTgt>
+                                        </p:tgtEl>
+                                        <p:attrNameLst>
+                                          <p:attrName>style.visibility</p:attrName>
+                                        </p:attrNameLst>
+                                      </p:cBhvr>
+                                      <p:to>
+                                        <p:strVal val="visible"/>
+                                      </p:to>
+                                    </p:set>
+                                    <p:anim calcmode="lin" valueType="num">
+                                      <p:cBhvr additive="base">
+                                        <p:cTn id="19" dur="500" fill="hold"/>
+                                        <p:tgtEl>
+                                          <p:spTgt spid="6">
+                                            <p:txEl>
+                                              <p:pRg st="0" end="0"/>
+                                            </p:txEl>
+                                          </p:spTgt>
+                                        </p:tgtEl>
+                                        <p:attrNameLst>
+                                          <p:attrName>ppt_x</p:attrName>
+                                        </p:attrNameLst>
+                                      </p:cBhvr>
+                                      <p:tavLst>
+                                        <p:tav tm="0">
+                                          <p:val>
+                                            <p:strVal val="#ppt_x"/>
+                                          </p:val>
+                                        </p:tav>
+                                        <p:tav tm="100000">
+                                          <p:val>
+                                            <p:strVal val="#ppt_x"/>
+                                          </p:val>
+                                        </p:tav>
+                                      </p:tavLst>
+                                    </p:anim>
+                                    <p:anim calcmode="lin" valueType="num">
+                                      <p:cBhvr additive="base">
+                                        <p:cTn id="20" dur="500" fill="hold"/>
+                                        <p:tgtEl>
+                                          <p:spTgt spid="6">
+                                            <p:txEl>
+                                              <p:pRg st="0" end="0"/>
+                                            </p:txEl>
+                                          </p:spTgt>
+                                        </p:tgtEl>
+                                        <p:attrNameLst>
+                                          <p:attrName>ppt_y</p:attrName>
+                                        </p:attrNameLst>
+                                      </p:cBhvr>
+                                      <p:tavLst>
+                                        <p:tav tm="0">
+                                          <p:val>
+                                            <p:strVal val="1+#ppt_h/2"/>
+                                          </p:val>
+                                        </p:tav>
+                                        <p:tav tm="100000">
+                                          <p:val>
+                                            <p:strVal val="#ppt_y"/>
+                                          </p:val>
+                                        </p:tav>
+                                      </p:tavLst>
+                                    </p:anim>
+                                  </p:childTnLst>
+                                </p:cTn>
+                              </p:par>
+                            </p:childTnLst>
+                          </p:cTn>
+                        </p:par>
+                      </p:childTnLst>
+                    </p:cTn>
+                  </p:par>
+                  <p:par>
+                    <p:cTn id="21" fill="hold">
+                      <p:stCondLst>
+                        <p:cond delay="indefinite"/>
+                      </p:stCondLst>
+                      <p:childTnLst>
+                        <p:par>
+                          <p:cTn id="22" fill="hold">
+                            <p:stCondLst>
+                              <p:cond delay="0"/>
+                            </p:stCondLst>
+                            <p:childTnLst>
+                              <p:par>
+                                <p:cTn id="23" presetID="2" presetClass="entr" presetSubtype="4" fill="hold" grpId="0" nodeType="clickEffect">
+                                  <p:stCondLst>
+                                    <p:cond delay="0"/>
+                                  </p:stCondLst>
+                                  <p:childTnLst>
+                                    <p:set>
+                                      <p:cBhvr>
+                                        <p:cTn id="24" dur="1" fill="hold">
+                                          <p:stCondLst>
+                                            <p:cond delay="0"/>
+                                          </p:stCondLst>
+                                        </p:cTn>
+                                        <p:tgtEl>
+                                          <p:spTgt spid="9"/>
+                                        </p:tgtEl>
+                                        <p:attrNameLst>
+                                          <p:attrName>style.visibility</p:attrName>
+                                        </p:attrNameLst>
+                                      </p:cBhvr>
+                                      <p:to>
+                                        <p:strVal val="visible"/>
+                                      </p:to>
+                                    </p:set>
+                                    <p:anim calcmode="lin" valueType="num">
+                                      <p:cBhvr additive="base">
+                                        <p:cTn id="25" dur="500" fill="hold"/>
+                                        <p:tgtEl>
+                                          <p:spTgt spid="9"/>
+                                        </p:tgtEl>
+                                        <p:attrNameLst>
+                                          <p:attrName>ppt_x</p:attrName>
+                                        </p:attrNameLst>
+                                      </p:cBhvr>
+                                      <p:tavLst>
+                                        <p:tav tm="0">
+                                          <p:val>
+                                            <p:strVal val="#ppt_x"/>
+                                          </p:val>
+                                        </p:tav>
+                                        <p:tav tm="100000">
+                                          <p:val>
+                                            <p:strVal val="#ppt_x"/>
+                                          </p:val>
+                                        </p:tav>
+                                      </p:tavLst>
+                                    </p:anim>
+                                    <p:anim calcmode="lin" valueType="num">
+                                      <p:cBhvr additive="base">
+                                        <p:cTn id="26" dur="500" fill="hold"/>
+                                        <p:tgtEl>
+                                          <p:spTgt spid="9"/>
+                                        </p:tgtEl>
+                                        <p:attrNameLst>
+                                          <p:attrName>ppt_y</p:attrName>
+                                        </p:attrNameLst>
+                                      </p:cBhvr>
+                                      <p:tavLst>
+                                        <p:tav tm="0">
+                                          <p:val>
+                                            <p:strVal val="1+#ppt_h/2"/>
+                                          </p:val>
+                                        </p:tav>
+                                        <p:tav tm="100000">
+                                          <p:val>
+                                            <p:strVal val="#ppt_y"/>
+                                          </p:val>
+                                        </p:tav>
+                                      </p:tavLst>
+                                    </p:anim>
+                                  </p:childTnLst>
+                                </p:cTn>
+                              </p:par>
+                            </p:childTnLst>
+                          </p:cTn>
+                        </p:par>
+                      </p:childTnLst>
+                    </p:cTn>
+                  </p:par>
+                  <p:par>
+                    <p:cTn id="27" fill="hold">
+                      <p:stCondLst>
+                        <p:cond delay="indefinite"/>
+                      </p:stCondLst>
+                      <p:childTnLst>
+                        <p:par>
+                          <p:cTn id="28" fill="hold">
+                            <p:stCondLst>
+                              <p:cond delay="0"/>
+                            </p:stCondLst>
+                            <p:childTnLst>
+                              <p:par>
+                                <p:cTn id="29" presetID="2" presetClass="entr" presetSubtype="4" fill="hold" grpId="0" nodeType="clickEffect">
+                                  <p:stCondLst>
+                                    <p:cond delay="0"/>
+                                  </p:stCondLst>
+                                  <p:childTnLst>
+                                    <p:set>
+                                      <p:cBhvr>
+                                        <p:cTn id="30" dur="1" fill="hold">
+                                          <p:stCondLst>
+                                            <p:cond delay="0"/>
+                                          </p:stCondLst>
+                                        </p:cTn>
+                                        <p:tgtEl>
+                                          <p:spTgt spid="13"/>
+                                        </p:tgtEl>
+                                        <p:attrNameLst>
+                                          <p:attrName>style.visibility</p:attrName>
+                                        </p:attrNameLst>
+                                      </p:cBhvr>
+                                      <p:to>
+                                        <p:strVal val="visible"/>
+                                      </p:to>
+                                    </p:set>
+                                    <p:anim calcmode="lin" valueType="num">
+                                      <p:cBhvr additive="base">
+                                        <p:cTn id="31" dur="500" fill="hold"/>
+                                        <p:tgtEl>
+                                          <p:spTgt spid="13"/>
+                                        </p:tgtEl>
+                                        <p:attrNameLst>
+                                          <p:attrName>ppt_x</p:attrName>
+                                        </p:attrNameLst>
+                                      </p:cBhvr>
+                                      <p:tavLst>
+                                        <p:tav tm="0">
+                                          <p:val>
+                                            <p:strVal val="#ppt_x"/>
+                                          </p:val>
+                                        </p:tav>
+                                        <p:tav tm="100000">
+                                          <p:val>
+                                            <p:strVal val="#ppt_x"/>
+                                          </p:val>
+                                        </p:tav>
+                                      </p:tavLst>
+                                    </p:anim>
+                                    <p:anim calcmode="lin" valueType="num">
+                                      <p:cBhvr additive="base">
+                                        <p:cTn id="32" dur="500" fill="hold"/>
+                                        <p:tgtEl>
+                                          <p:spTgt spid="13"/>
+                                        </p:tgtEl>
+                                        <p:attrNameLst>
+                                          <p:attrName>ppt_y</p:attrName>
+                                        </p:attrNameLst>
+                                      </p:cBhvr>
+                                      <p:tavLst>
+                                        <p:tav tm="0">
+                                          <p:val>
+                                            <p:strVal val="1+#ppt_h/2"/>
+                                          </p:val>
+                                        </p:tav>
+                                        <p:tav tm="100000">
+                                          <p:val>
+                                            <p:strVal val="#ppt_y"/>
+                                          </p:val>
+                                        </p:tav>
+                                      </p:tavLst>
+                                    </p:anim>
+                                  </p:childTnLst>
+                                </p:cTn>
+                              </p:par>
+                            </p:childTnLst>
+                          </p:cTn>
+                        </p:par>
+                      </p:childTnLst>
+                    </p:cTn>
+                  </p:par>
+                  <p:par>
+                    <p:cTn id="33" fill="hold">
+                      <p:stCondLst>
+                        <p:cond delay="indefinite"/>
+                      </p:stCondLst>
+                      <p:childTnLst>
+                        <p:par>
+                          <p:cTn id="34" fill="hold">
+                            <p:stCondLst>
+                              <p:cond delay="0"/>
+                            </p:stCondLst>
+                            <p:childTnLst>
+                              <p:par>
+                                <p:cTn id="35" presetID="2" presetClass="entr" presetSubtype="4" fill="hold" nodeType="clickEffect">
+                                  <p:stCondLst>
+                                    <p:cond delay="0"/>
+                                  </p:stCondLst>
+                                  <p:childTnLst>
+                                    <p:set>
+                                      <p:cBhvr>
+                                        <p:cTn id="36" dur="1" fill="hold">
+                                          <p:stCondLst>
+                                            <p:cond delay="0"/>
+                                          </p:stCondLst>
+                                        </p:cTn>
+                                        <p:tgtEl>
+                                          <p:spTgt spid="6">
+                                            <p:txEl>
+                                              <p:pRg st="1" end="1"/>
+                                            </p:txEl>
+                                          </p:spTgt>
+                                        </p:tgtEl>
+                                        <p:attrNameLst>
+                                          <p:attrName>style.visibility</p:attrName>
+                                        </p:attrNameLst>
+                                      </p:cBhvr>
+                                      <p:to>
+                                        <p:strVal val="visible"/>
+                                      </p:to>
+                                    </p:set>
+                                    <p:anim calcmode="lin" valueType="num">
+                                      <p:cBhvr additive="base">
+                                        <p:cTn id="37" dur="500" fill="hold"/>
+                                        <p:tgtEl>
+                                          <p:spTgt spid="6">
+                                            <p:txEl>
+                                              <p:pRg st="1" end="1"/>
+                                            </p:txEl>
+                                          </p:spTgt>
+                                        </p:tgtEl>
+                                        <p:attrNameLst>
+                                          <p:attrName>ppt_x</p:attrName>
+                                        </p:attrNameLst>
+                                      </p:cBhvr>
+                                      <p:tavLst>
+                                        <p:tav tm="0">
+                                          <p:val>
+                                            <p:strVal val="#ppt_x"/>
+                                          </p:val>
+                                        </p:tav>
+                                        <p:tav tm="100000">
+                                          <p:val>
+                                            <p:strVal val="#ppt_x"/>
+                                          </p:val>
+                                        </p:tav>
+                                      </p:tavLst>
+                                    </p:anim>
+                                    <p:anim calcmode="lin" valueType="num">
+                                      <p:cBhvr additive="base">
+                                        <p:cTn id="38" dur="500" fill="hold"/>
+                                        <p:tgtEl>
+                                          <p:spTgt spid="6">
+                                            <p:txEl>
+                                              <p:pRg st="1" end="1"/>
+                                            </p:txEl>
+                                          </p:spTgt>
+                                        </p:tgtEl>
+                                        <p:attrNameLst>
+                                          <p:attrName>ppt_y</p:attrName>
+                                        </p:attrNameLst>
+                                      </p:cBhvr>
+                                      <p:tavLst>
+                                        <p:tav tm="0">
+                                          <p:val>
+                                            <p:strVal val="1+#ppt_h/2"/>
+                                          </p:val>
+                                        </p:tav>
+                                        <p:tav tm="100000">
+                                          <p:val>
+                                            <p:strVal val="#ppt_y"/>
+                                          </p:val>
+                                        </p:tav>
+                                      </p:tavLst>
+                                    </p:anim>
+                                  </p:childTnLst>
+                                </p:cTn>
+                              </p:par>
+                            </p:childTnLst>
+                          </p:cTn>
+                        </p:par>
+                      </p:childTnLst>
+                    </p:cTn>
+                  </p:par>
+                </p:childTnLst>
+              </p:cTn>
+              <p:prevCondLst>
+                <p:cond evt="onPrev" delay="0">
+                  <p:tgtEl>
+                    <p:sldTgt/>
+                  </p:tgtEl>
+                </p:cond>
+              </p:prevCondLst>
+              <p:nextCondLst>
+                <p:cond evt="onNext" delay="0">
+                  <p:tgtEl>
+                    <p:sldTgt/>
+                  </p:tgtEl>
+                </p:cond>
+              </p:nextCondLst>
+            </p:seq>
+          </p:childTnLst>
+        </p:cTn>
+      </p:par>
+    </p:tnLst>
+    <p:bldLst>
+      <p:bldP spid="4" grpId="0" animBg="1"/>
+      <p:bldP spid="5" grpId="0" animBg="1"/>
+      <p:bldP spid="9" grpId="0" animBg="1"/>
+      <p:bldP spid="13" grpId="0"/>
+    </p:bldLst>
+  </p:timing>
 </p:sld>
 </file>
 
@@ -19947,14 +22673,14 @@
           </a:xfrm>
           <a:extLst>
             <a:ext uri="{909E8E84-426E-40dd-AFC4-6F175D3DCCD1}">
-              <a14:hiddenFill xmlns:a14="http://schemas.microsoft.com/office/drawing/2010/main" xmlns="">
+              <a14:hiddenFill xmlns="" xmlns:a14="http://schemas.microsoft.com/office/drawing/2010/main">
                 <a:solidFill>
                   <a:srgbClr val="FFFFFF"/>
                 </a:solidFill>
               </a14:hiddenFill>
             </a:ext>
             <a:ext uri="{91240B29-F687-4f45-9708-019B960494DF}">
-              <a14:hiddenLine xmlns:a14="http://schemas.microsoft.com/office/drawing/2010/main" xmlns="" w="9525">
+              <a14:hiddenLine xmlns="" xmlns:a14="http://schemas.microsoft.com/office/drawing/2010/main" w="9525">
                 <a:solidFill>
                   <a:srgbClr val="000000"/>
                 </a:solidFill>
@@ -20719,6 +23445,1181 @@
 </p:sld>
 </file>
 
+<file path=ppt/slides/slide20.xml><?xml version="1.0" encoding="utf-8"?>
+<p:sld xmlns:a="http://schemas.openxmlformats.org/drawingml/2006/main" xmlns:r="http://schemas.openxmlformats.org/officeDocument/2006/relationships" xmlns:p="http://schemas.openxmlformats.org/presentationml/2006/main">
+  <p:cSld>
+    <p:spTree>
+      <p:nvGrpSpPr>
+        <p:cNvPr id="1" name="">
+          <a:extLst>
+            <a:ext uri="{FF2B5EF4-FFF2-40B4-BE49-F238E27FC236}">
+              <a16:creationId xmlns:a16="http://schemas.microsoft.com/office/drawing/2014/main" id="{0230B932-DC6A-34FD-37D7-5D71EBA939B7}"/>
+            </a:ext>
+          </a:extLst>
+        </p:cNvPr>
+        <p:cNvGrpSpPr/>
+        <p:nvPr/>
+      </p:nvGrpSpPr>
+      <p:grpSpPr>
+        <a:xfrm>
+          <a:off x="0" y="0"/>
+          <a:ext cx="0" cy="0"/>
+          <a:chOff x="0" y="0"/>
+          <a:chExt cx="0" cy="0"/>
+        </a:xfrm>
+      </p:grpSpPr>
+      <p:sp>
+        <p:nvSpPr>
+          <p:cNvPr id="2" name="Title 1">
+            <a:extLst>
+              <a:ext uri="{FF2B5EF4-FFF2-40B4-BE49-F238E27FC236}">
+                <a16:creationId xmlns:a16="http://schemas.microsoft.com/office/drawing/2014/main" id="{06C5F598-7541-8C88-0129-15A1E3C7AA4F}"/>
+              </a:ext>
+            </a:extLst>
+          </p:cNvPr>
+          <p:cNvSpPr>
+            <a:spLocks noGrp="1"/>
+          </p:cNvSpPr>
+          <p:nvPr>
+            <p:ph type="title"/>
+          </p:nvPr>
+        </p:nvSpPr>
+        <p:spPr/>
+        <p:txBody>
+          <a:bodyPr>
+            <a:normAutofit fontScale="90000"/>
+          </a:bodyPr>
+          <a:lstStyle/>
+          <a:p>
+            <a:r>
+              <a:rPr lang="en-US" dirty="0"/>
+              <a:t>Possible Errors – 4 – </a:t>
+            </a:r>
+            <a:r>
+              <a:rPr lang="en-IE" dirty="0"/>
+              <a:t>Trying to evaluate before application</a:t>
+            </a:r>
+            <a:endParaRPr lang="en-US" dirty="0"/>
+          </a:p>
+        </p:txBody>
+      </p:sp>
+      <p:sp>
+        <p:nvSpPr>
+          <p:cNvPr id="4" name="TextBox 3">
+            <a:extLst>
+              <a:ext uri="{FF2B5EF4-FFF2-40B4-BE49-F238E27FC236}">
+                <a16:creationId xmlns:a16="http://schemas.microsoft.com/office/drawing/2014/main" id="{8625C9AF-7786-FEA2-3D06-49AC8D4DC7C5}"/>
+              </a:ext>
+            </a:extLst>
+          </p:cNvPr>
+          <p:cNvSpPr txBox="1"/>
+          <p:nvPr/>
+        </p:nvSpPr>
+        <p:spPr>
+          <a:xfrm>
+            <a:off x="1000027" y="1525721"/>
+            <a:ext cx="2013015" cy="276999"/>
+          </a:xfrm>
+          <a:prstGeom prst="rect">
+            <a:avLst/>
+          </a:prstGeom>
+          <a:solidFill>
+            <a:schemeClr val="accent4"/>
+          </a:solidFill>
+          <a:ln>
+            <a:solidFill>
+              <a:schemeClr val="bg1"/>
+            </a:solidFill>
+          </a:ln>
+        </p:spPr>
+        <p:txBody>
+          <a:bodyPr wrap="square" rtlCol="0">
+            <a:spAutoFit/>
+          </a:bodyPr>
+          <a:lstStyle/>
+          <a:p>
+            <a:r>
+              <a:rPr lang="en-US" sz="1200" dirty="0">
+                <a:solidFill>
+                  <a:schemeClr val="bg1"/>
+                </a:solidFill>
+              </a:rPr>
+              <a:t>\y -&gt; if x &lt; y then -1 else 1</a:t>
+            </a:r>
+          </a:p>
+        </p:txBody>
+      </p:sp>
+      <p:sp>
+        <p:nvSpPr>
+          <p:cNvPr id="5" name="Multiply 4">
+            <a:extLst>
+              <a:ext uri="{FF2B5EF4-FFF2-40B4-BE49-F238E27FC236}">
+                <a16:creationId xmlns:a16="http://schemas.microsoft.com/office/drawing/2014/main" id="{095163FB-8B6A-38DB-2542-D084E8A1A79E}"/>
+              </a:ext>
+            </a:extLst>
+          </p:cNvPr>
+          <p:cNvSpPr/>
+          <p:nvPr/>
+        </p:nvSpPr>
+        <p:spPr>
+          <a:xfrm>
+            <a:off x="3219450" y="1425575"/>
+            <a:ext cx="412815" cy="411237"/>
+          </a:xfrm>
+          <a:prstGeom prst="mathMultiply">
+            <a:avLst/>
+          </a:prstGeom>
+          <a:solidFill>
+            <a:schemeClr val="accent5"/>
+          </a:solidFill>
+        </p:spPr>
+        <p:style>
+          <a:lnRef idx="2">
+            <a:schemeClr val="accent1">
+              <a:shade val="15000"/>
+            </a:schemeClr>
+          </a:lnRef>
+          <a:fillRef idx="1">
+            <a:schemeClr val="accent1"/>
+          </a:fillRef>
+          <a:effectRef idx="0">
+            <a:schemeClr val="accent1"/>
+          </a:effectRef>
+          <a:fontRef idx="minor">
+            <a:schemeClr val="lt1"/>
+          </a:fontRef>
+        </p:style>
+        <p:txBody>
+          <a:bodyPr rtlCol="0" anchor="ctr"/>
+          <a:lstStyle/>
+          <a:p>
+            <a:pPr algn="ctr"/>
+            <a:endParaRPr lang="en-US" dirty="0"/>
+          </a:p>
+        </p:txBody>
+      </p:sp>
+      <p:sp>
+        <p:nvSpPr>
+          <p:cNvPr id="6" name="TextBox 5">
+            <a:extLst>
+              <a:ext uri="{FF2B5EF4-FFF2-40B4-BE49-F238E27FC236}">
+                <a16:creationId xmlns:a16="http://schemas.microsoft.com/office/drawing/2014/main" id="{B098657C-5B5E-EC8E-D34C-3B9B8F6B72D3}"/>
+              </a:ext>
+            </a:extLst>
+          </p:cNvPr>
+          <p:cNvSpPr txBox="1"/>
+          <p:nvPr/>
+        </p:nvSpPr>
+        <p:spPr>
+          <a:xfrm>
+            <a:off x="520634" y="1970964"/>
+            <a:ext cx="3841816" cy="461665"/>
+          </a:xfrm>
+          <a:prstGeom prst="rect">
+            <a:avLst/>
+          </a:prstGeom>
+          <a:noFill/>
+        </p:spPr>
+        <p:txBody>
+          <a:bodyPr wrap="square" rtlCol="0">
+            <a:spAutoFit/>
+          </a:bodyPr>
+          <a:lstStyle/>
+          <a:p>
+            <a:r>
+              <a:rPr lang="en-US" sz="1200" dirty="0">
+                <a:solidFill>
+                  <a:schemeClr val="bg1"/>
+                </a:solidFill>
+              </a:rPr>
+              <a:t>What’s wrong? </a:t>
+            </a:r>
+          </a:p>
+          <a:p>
+            <a:r>
+              <a:rPr lang="en-IE" sz="1200" dirty="0">
+                <a:solidFill>
+                  <a:schemeClr val="bg1"/>
+                </a:solidFill>
+              </a:rPr>
+              <a:t>x is not bound anywhere</a:t>
+            </a:r>
+            <a:endParaRPr lang="en-US" sz="1200" dirty="0">
+              <a:solidFill>
+                <a:schemeClr val="bg1"/>
+              </a:solidFill>
+            </a:endParaRPr>
+          </a:p>
+        </p:txBody>
+      </p:sp>
+      <p:sp>
+        <p:nvSpPr>
+          <p:cNvPr id="9" name="TextBox 8">
+            <a:extLst>
+              <a:ext uri="{FF2B5EF4-FFF2-40B4-BE49-F238E27FC236}">
+                <a16:creationId xmlns:a16="http://schemas.microsoft.com/office/drawing/2014/main" id="{4F4DECEA-916F-22F0-C5D7-17968D7883C6}"/>
+              </a:ext>
+            </a:extLst>
+          </p:cNvPr>
+          <p:cNvSpPr txBox="1"/>
+          <p:nvPr/>
+        </p:nvSpPr>
+        <p:spPr>
+          <a:xfrm>
+            <a:off x="892156" y="2855552"/>
+            <a:ext cx="2228756" cy="276999"/>
+          </a:xfrm>
+          <a:prstGeom prst="rect">
+            <a:avLst/>
+          </a:prstGeom>
+          <a:solidFill>
+            <a:schemeClr val="accent4"/>
+          </a:solidFill>
+          <a:ln>
+            <a:solidFill>
+              <a:schemeClr val="bg1"/>
+            </a:solidFill>
+          </a:ln>
+        </p:spPr>
+        <p:txBody>
+          <a:bodyPr wrap="square" rtlCol="0">
+            <a:spAutoFit/>
+          </a:bodyPr>
+          <a:lstStyle/>
+          <a:p>
+            <a:r>
+              <a:rPr lang="en-US" sz="1200" dirty="0">
+                <a:solidFill>
+                  <a:schemeClr val="bg1"/>
+                </a:solidFill>
+              </a:rPr>
+              <a:t>\x y -&gt; if x &lt; y then -1 else 1</a:t>
+            </a:r>
+          </a:p>
+        </p:txBody>
+      </p:sp>
+      <p:sp>
+        <p:nvSpPr>
+          <p:cNvPr id="13" name="TextBox 12">
+            <a:extLst>
+              <a:ext uri="{FF2B5EF4-FFF2-40B4-BE49-F238E27FC236}">
+                <a16:creationId xmlns:a16="http://schemas.microsoft.com/office/drawing/2014/main" id="{ACACE921-56FA-A69D-ADBA-8B4CF0338E28}"/>
+              </a:ext>
+            </a:extLst>
+          </p:cNvPr>
+          <p:cNvSpPr txBox="1"/>
+          <p:nvPr/>
+        </p:nvSpPr>
+        <p:spPr>
+          <a:xfrm>
+            <a:off x="3286052" y="2809385"/>
+            <a:ext cx="312254" cy="369332"/>
+          </a:xfrm>
+          <a:prstGeom prst="rect">
+            <a:avLst/>
+          </a:prstGeom>
+          <a:noFill/>
+        </p:spPr>
+        <p:txBody>
+          <a:bodyPr wrap="square">
+            <a:spAutoFit/>
+          </a:bodyPr>
+          <a:lstStyle/>
+          <a:p>
+            <a:r>
+              <a:rPr lang="en-IE" b="1" dirty="0">
+                <a:solidFill>
+                  <a:schemeClr val="accent2">
+                    <a:lumMod val="75000"/>
+                  </a:schemeClr>
+                </a:solidFill>
+              </a:rPr>
+              <a:t>✓</a:t>
+            </a:r>
+            <a:endParaRPr lang="en-US" b="1" dirty="0">
+              <a:solidFill>
+                <a:schemeClr val="accent2">
+                  <a:lumMod val="75000"/>
+                </a:schemeClr>
+              </a:solidFill>
+            </a:endParaRPr>
+          </a:p>
+        </p:txBody>
+      </p:sp>
+    </p:spTree>
+    <p:extLst>
+      <p:ext uri="{BB962C8B-B14F-4D97-AF65-F5344CB8AC3E}">
+        <p14:creationId xmlns:p14="http://schemas.microsoft.com/office/powerpoint/2010/main" val="2151109983"/>
+      </p:ext>
+    </p:extLst>
+  </p:cSld>
+  <p:clrMapOvr>
+    <a:masterClrMapping/>
+  </p:clrMapOvr>
+  <p:timing>
+    <p:tnLst>
+      <p:par>
+        <p:cTn id="1" dur="indefinite" restart="never" nodeType="tmRoot">
+          <p:childTnLst>
+            <p:seq concurrent="1" nextAc="seek">
+              <p:cTn id="2" dur="indefinite" nodeType="mainSeq">
+                <p:childTnLst>
+                  <p:par>
+                    <p:cTn id="3" fill="hold">
+                      <p:stCondLst>
+                        <p:cond delay="indefinite"/>
+                      </p:stCondLst>
+                      <p:childTnLst>
+                        <p:par>
+                          <p:cTn id="4" fill="hold">
+                            <p:stCondLst>
+                              <p:cond delay="0"/>
+                            </p:stCondLst>
+                            <p:childTnLst>
+                              <p:par>
+                                <p:cTn id="5" presetID="2" presetClass="entr" presetSubtype="4" fill="hold" grpId="0" nodeType="clickEffect">
+                                  <p:stCondLst>
+                                    <p:cond delay="0"/>
+                                  </p:stCondLst>
+                                  <p:childTnLst>
+                                    <p:set>
+                                      <p:cBhvr>
+                                        <p:cTn id="6" dur="1" fill="hold">
+                                          <p:stCondLst>
+                                            <p:cond delay="0"/>
+                                          </p:stCondLst>
+                                        </p:cTn>
+                                        <p:tgtEl>
+                                          <p:spTgt spid="4"/>
+                                        </p:tgtEl>
+                                        <p:attrNameLst>
+                                          <p:attrName>style.visibility</p:attrName>
+                                        </p:attrNameLst>
+                                      </p:cBhvr>
+                                      <p:to>
+                                        <p:strVal val="visible"/>
+                                      </p:to>
+                                    </p:set>
+                                    <p:anim calcmode="lin" valueType="num">
+                                      <p:cBhvr additive="base">
+                                        <p:cTn id="7" dur="500" fill="hold"/>
+                                        <p:tgtEl>
+                                          <p:spTgt spid="4"/>
+                                        </p:tgtEl>
+                                        <p:attrNameLst>
+                                          <p:attrName>ppt_x</p:attrName>
+                                        </p:attrNameLst>
+                                      </p:cBhvr>
+                                      <p:tavLst>
+                                        <p:tav tm="0">
+                                          <p:val>
+                                            <p:strVal val="#ppt_x"/>
+                                          </p:val>
+                                        </p:tav>
+                                        <p:tav tm="100000">
+                                          <p:val>
+                                            <p:strVal val="#ppt_x"/>
+                                          </p:val>
+                                        </p:tav>
+                                      </p:tavLst>
+                                    </p:anim>
+                                    <p:anim calcmode="lin" valueType="num">
+                                      <p:cBhvr additive="base">
+                                        <p:cTn id="8" dur="500" fill="hold"/>
+                                        <p:tgtEl>
+                                          <p:spTgt spid="4"/>
+                                        </p:tgtEl>
+                                        <p:attrNameLst>
+                                          <p:attrName>ppt_y</p:attrName>
+                                        </p:attrNameLst>
+                                      </p:cBhvr>
+                                      <p:tavLst>
+                                        <p:tav tm="0">
+                                          <p:val>
+                                            <p:strVal val="1+#ppt_h/2"/>
+                                          </p:val>
+                                        </p:tav>
+                                        <p:tav tm="100000">
+                                          <p:val>
+                                            <p:strVal val="#ppt_y"/>
+                                          </p:val>
+                                        </p:tav>
+                                      </p:tavLst>
+                                    </p:anim>
+                                  </p:childTnLst>
+                                </p:cTn>
+                              </p:par>
+                            </p:childTnLst>
+                          </p:cTn>
+                        </p:par>
+                      </p:childTnLst>
+                    </p:cTn>
+                  </p:par>
+                  <p:par>
+                    <p:cTn id="9" fill="hold">
+                      <p:stCondLst>
+                        <p:cond delay="indefinite"/>
+                      </p:stCondLst>
+                      <p:childTnLst>
+                        <p:par>
+                          <p:cTn id="10" fill="hold">
+                            <p:stCondLst>
+                              <p:cond delay="0"/>
+                            </p:stCondLst>
+                            <p:childTnLst>
+                              <p:par>
+                                <p:cTn id="11" presetID="2" presetClass="entr" presetSubtype="4" fill="hold" grpId="0" nodeType="clickEffect">
+                                  <p:stCondLst>
+                                    <p:cond delay="0"/>
+                                  </p:stCondLst>
+                                  <p:childTnLst>
+                                    <p:set>
+                                      <p:cBhvr>
+                                        <p:cTn id="12" dur="1" fill="hold">
+                                          <p:stCondLst>
+                                            <p:cond delay="0"/>
+                                          </p:stCondLst>
+                                        </p:cTn>
+                                        <p:tgtEl>
+                                          <p:spTgt spid="5"/>
+                                        </p:tgtEl>
+                                        <p:attrNameLst>
+                                          <p:attrName>style.visibility</p:attrName>
+                                        </p:attrNameLst>
+                                      </p:cBhvr>
+                                      <p:to>
+                                        <p:strVal val="visible"/>
+                                      </p:to>
+                                    </p:set>
+                                    <p:anim calcmode="lin" valueType="num">
+                                      <p:cBhvr additive="base">
+                                        <p:cTn id="13" dur="500" fill="hold"/>
+                                        <p:tgtEl>
+                                          <p:spTgt spid="5"/>
+                                        </p:tgtEl>
+                                        <p:attrNameLst>
+                                          <p:attrName>ppt_x</p:attrName>
+                                        </p:attrNameLst>
+                                      </p:cBhvr>
+                                      <p:tavLst>
+                                        <p:tav tm="0">
+                                          <p:val>
+                                            <p:strVal val="#ppt_x"/>
+                                          </p:val>
+                                        </p:tav>
+                                        <p:tav tm="100000">
+                                          <p:val>
+                                            <p:strVal val="#ppt_x"/>
+                                          </p:val>
+                                        </p:tav>
+                                      </p:tavLst>
+                                    </p:anim>
+                                    <p:anim calcmode="lin" valueType="num">
+                                      <p:cBhvr additive="base">
+                                        <p:cTn id="14" dur="500" fill="hold"/>
+                                        <p:tgtEl>
+                                          <p:spTgt spid="5"/>
+                                        </p:tgtEl>
+                                        <p:attrNameLst>
+                                          <p:attrName>ppt_y</p:attrName>
+                                        </p:attrNameLst>
+                                      </p:cBhvr>
+                                      <p:tavLst>
+                                        <p:tav tm="0">
+                                          <p:val>
+                                            <p:strVal val="1+#ppt_h/2"/>
+                                          </p:val>
+                                        </p:tav>
+                                        <p:tav tm="100000">
+                                          <p:val>
+                                            <p:strVal val="#ppt_y"/>
+                                          </p:val>
+                                        </p:tav>
+                                      </p:tavLst>
+                                    </p:anim>
+                                  </p:childTnLst>
+                                </p:cTn>
+                              </p:par>
+                            </p:childTnLst>
+                          </p:cTn>
+                        </p:par>
+                      </p:childTnLst>
+                    </p:cTn>
+                  </p:par>
+                  <p:par>
+                    <p:cTn id="15" fill="hold">
+                      <p:stCondLst>
+                        <p:cond delay="indefinite"/>
+                      </p:stCondLst>
+                      <p:childTnLst>
+                        <p:par>
+                          <p:cTn id="16" fill="hold">
+                            <p:stCondLst>
+                              <p:cond delay="0"/>
+                            </p:stCondLst>
+                            <p:childTnLst>
+                              <p:par>
+                                <p:cTn id="17" presetID="2" presetClass="entr" presetSubtype="4" fill="hold" nodeType="clickEffect">
+                                  <p:stCondLst>
+                                    <p:cond delay="0"/>
+                                  </p:stCondLst>
+                                  <p:childTnLst>
+                                    <p:set>
+                                      <p:cBhvr>
+                                        <p:cTn id="18" dur="1" fill="hold">
+                                          <p:stCondLst>
+                                            <p:cond delay="0"/>
+                                          </p:stCondLst>
+                                        </p:cTn>
+                                        <p:tgtEl>
+                                          <p:spTgt spid="6">
+                                            <p:txEl>
+                                              <p:pRg st="0" end="0"/>
+                                            </p:txEl>
+                                          </p:spTgt>
+                                        </p:tgtEl>
+                                        <p:attrNameLst>
+                                          <p:attrName>style.visibility</p:attrName>
+                                        </p:attrNameLst>
+                                      </p:cBhvr>
+                                      <p:to>
+                                        <p:strVal val="visible"/>
+                                      </p:to>
+                                    </p:set>
+                                    <p:anim calcmode="lin" valueType="num">
+                                      <p:cBhvr additive="base">
+                                        <p:cTn id="19" dur="500" fill="hold"/>
+                                        <p:tgtEl>
+                                          <p:spTgt spid="6">
+                                            <p:txEl>
+                                              <p:pRg st="0" end="0"/>
+                                            </p:txEl>
+                                          </p:spTgt>
+                                        </p:tgtEl>
+                                        <p:attrNameLst>
+                                          <p:attrName>ppt_x</p:attrName>
+                                        </p:attrNameLst>
+                                      </p:cBhvr>
+                                      <p:tavLst>
+                                        <p:tav tm="0">
+                                          <p:val>
+                                            <p:strVal val="#ppt_x"/>
+                                          </p:val>
+                                        </p:tav>
+                                        <p:tav tm="100000">
+                                          <p:val>
+                                            <p:strVal val="#ppt_x"/>
+                                          </p:val>
+                                        </p:tav>
+                                      </p:tavLst>
+                                    </p:anim>
+                                    <p:anim calcmode="lin" valueType="num">
+                                      <p:cBhvr additive="base">
+                                        <p:cTn id="20" dur="500" fill="hold"/>
+                                        <p:tgtEl>
+                                          <p:spTgt spid="6">
+                                            <p:txEl>
+                                              <p:pRg st="0" end="0"/>
+                                            </p:txEl>
+                                          </p:spTgt>
+                                        </p:tgtEl>
+                                        <p:attrNameLst>
+                                          <p:attrName>ppt_y</p:attrName>
+                                        </p:attrNameLst>
+                                      </p:cBhvr>
+                                      <p:tavLst>
+                                        <p:tav tm="0">
+                                          <p:val>
+                                            <p:strVal val="1+#ppt_h/2"/>
+                                          </p:val>
+                                        </p:tav>
+                                        <p:tav tm="100000">
+                                          <p:val>
+                                            <p:strVal val="#ppt_y"/>
+                                          </p:val>
+                                        </p:tav>
+                                      </p:tavLst>
+                                    </p:anim>
+                                  </p:childTnLst>
+                                </p:cTn>
+                              </p:par>
+                            </p:childTnLst>
+                          </p:cTn>
+                        </p:par>
+                      </p:childTnLst>
+                    </p:cTn>
+                  </p:par>
+                  <p:par>
+                    <p:cTn id="21" fill="hold">
+                      <p:stCondLst>
+                        <p:cond delay="indefinite"/>
+                      </p:stCondLst>
+                      <p:childTnLst>
+                        <p:par>
+                          <p:cTn id="22" fill="hold">
+                            <p:stCondLst>
+                              <p:cond delay="0"/>
+                            </p:stCondLst>
+                            <p:childTnLst>
+                              <p:par>
+                                <p:cTn id="23" presetID="2" presetClass="entr" presetSubtype="4" fill="hold" grpId="0" nodeType="clickEffect">
+                                  <p:stCondLst>
+                                    <p:cond delay="0"/>
+                                  </p:stCondLst>
+                                  <p:childTnLst>
+                                    <p:set>
+                                      <p:cBhvr>
+                                        <p:cTn id="24" dur="1" fill="hold">
+                                          <p:stCondLst>
+                                            <p:cond delay="0"/>
+                                          </p:stCondLst>
+                                        </p:cTn>
+                                        <p:tgtEl>
+                                          <p:spTgt spid="9"/>
+                                        </p:tgtEl>
+                                        <p:attrNameLst>
+                                          <p:attrName>style.visibility</p:attrName>
+                                        </p:attrNameLst>
+                                      </p:cBhvr>
+                                      <p:to>
+                                        <p:strVal val="visible"/>
+                                      </p:to>
+                                    </p:set>
+                                    <p:anim calcmode="lin" valueType="num">
+                                      <p:cBhvr additive="base">
+                                        <p:cTn id="25" dur="500" fill="hold"/>
+                                        <p:tgtEl>
+                                          <p:spTgt spid="9"/>
+                                        </p:tgtEl>
+                                        <p:attrNameLst>
+                                          <p:attrName>ppt_x</p:attrName>
+                                        </p:attrNameLst>
+                                      </p:cBhvr>
+                                      <p:tavLst>
+                                        <p:tav tm="0">
+                                          <p:val>
+                                            <p:strVal val="#ppt_x"/>
+                                          </p:val>
+                                        </p:tav>
+                                        <p:tav tm="100000">
+                                          <p:val>
+                                            <p:strVal val="#ppt_x"/>
+                                          </p:val>
+                                        </p:tav>
+                                      </p:tavLst>
+                                    </p:anim>
+                                    <p:anim calcmode="lin" valueType="num">
+                                      <p:cBhvr additive="base">
+                                        <p:cTn id="26" dur="500" fill="hold"/>
+                                        <p:tgtEl>
+                                          <p:spTgt spid="9"/>
+                                        </p:tgtEl>
+                                        <p:attrNameLst>
+                                          <p:attrName>ppt_y</p:attrName>
+                                        </p:attrNameLst>
+                                      </p:cBhvr>
+                                      <p:tavLst>
+                                        <p:tav tm="0">
+                                          <p:val>
+                                            <p:strVal val="1+#ppt_h/2"/>
+                                          </p:val>
+                                        </p:tav>
+                                        <p:tav tm="100000">
+                                          <p:val>
+                                            <p:strVal val="#ppt_y"/>
+                                          </p:val>
+                                        </p:tav>
+                                      </p:tavLst>
+                                    </p:anim>
+                                  </p:childTnLst>
+                                </p:cTn>
+                              </p:par>
+                            </p:childTnLst>
+                          </p:cTn>
+                        </p:par>
+                      </p:childTnLst>
+                    </p:cTn>
+                  </p:par>
+                  <p:par>
+                    <p:cTn id="27" fill="hold">
+                      <p:stCondLst>
+                        <p:cond delay="indefinite"/>
+                      </p:stCondLst>
+                      <p:childTnLst>
+                        <p:par>
+                          <p:cTn id="28" fill="hold">
+                            <p:stCondLst>
+                              <p:cond delay="0"/>
+                            </p:stCondLst>
+                            <p:childTnLst>
+                              <p:par>
+                                <p:cTn id="29" presetID="2" presetClass="entr" presetSubtype="4" fill="hold" grpId="0" nodeType="clickEffect">
+                                  <p:stCondLst>
+                                    <p:cond delay="0"/>
+                                  </p:stCondLst>
+                                  <p:childTnLst>
+                                    <p:set>
+                                      <p:cBhvr>
+                                        <p:cTn id="30" dur="1" fill="hold">
+                                          <p:stCondLst>
+                                            <p:cond delay="0"/>
+                                          </p:stCondLst>
+                                        </p:cTn>
+                                        <p:tgtEl>
+                                          <p:spTgt spid="13"/>
+                                        </p:tgtEl>
+                                        <p:attrNameLst>
+                                          <p:attrName>style.visibility</p:attrName>
+                                        </p:attrNameLst>
+                                      </p:cBhvr>
+                                      <p:to>
+                                        <p:strVal val="visible"/>
+                                      </p:to>
+                                    </p:set>
+                                    <p:anim calcmode="lin" valueType="num">
+                                      <p:cBhvr additive="base">
+                                        <p:cTn id="31" dur="500" fill="hold"/>
+                                        <p:tgtEl>
+                                          <p:spTgt spid="13"/>
+                                        </p:tgtEl>
+                                        <p:attrNameLst>
+                                          <p:attrName>ppt_x</p:attrName>
+                                        </p:attrNameLst>
+                                      </p:cBhvr>
+                                      <p:tavLst>
+                                        <p:tav tm="0">
+                                          <p:val>
+                                            <p:strVal val="#ppt_x"/>
+                                          </p:val>
+                                        </p:tav>
+                                        <p:tav tm="100000">
+                                          <p:val>
+                                            <p:strVal val="#ppt_x"/>
+                                          </p:val>
+                                        </p:tav>
+                                      </p:tavLst>
+                                    </p:anim>
+                                    <p:anim calcmode="lin" valueType="num">
+                                      <p:cBhvr additive="base">
+                                        <p:cTn id="32" dur="500" fill="hold"/>
+                                        <p:tgtEl>
+                                          <p:spTgt spid="13"/>
+                                        </p:tgtEl>
+                                        <p:attrNameLst>
+                                          <p:attrName>ppt_y</p:attrName>
+                                        </p:attrNameLst>
+                                      </p:cBhvr>
+                                      <p:tavLst>
+                                        <p:tav tm="0">
+                                          <p:val>
+                                            <p:strVal val="1+#ppt_h/2"/>
+                                          </p:val>
+                                        </p:tav>
+                                        <p:tav tm="100000">
+                                          <p:val>
+                                            <p:strVal val="#ppt_y"/>
+                                          </p:val>
+                                        </p:tav>
+                                      </p:tavLst>
+                                    </p:anim>
+                                  </p:childTnLst>
+                                </p:cTn>
+                              </p:par>
+                            </p:childTnLst>
+                          </p:cTn>
+                        </p:par>
+                      </p:childTnLst>
+                    </p:cTn>
+                  </p:par>
+                  <p:par>
+                    <p:cTn id="33" fill="hold">
+                      <p:stCondLst>
+                        <p:cond delay="indefinite"/>
+                      </p:stCondLst>
+                      <p:childTnLst>
+                        <p:par>
+                          <p:cTn id="34" fill="hold">
+                            <p:stCondLst>
+                              <p:cond delay="0"/>
+                            </p:stCondLst>
+                            <p:childTnLst>
+                              <p:par>
+                                <p:cTn id="35" presetID="2" presetClass="entr" presetSubtype="4" fill="hold" nodeType="clickEffect">
+                                  <p:stCondLst>
+                                    <p:cond delay="0"/>
+                                  </p:stCondLst>
+                                  <p:childTnLst>
+                                    <p:set>
+                                      <p:cBhvr>
+                                        <p:cTn id="36" dur="1" fill="hold">
+                                          <p:stCondLst>
+                                            <p:cond delay="0"/>
+                                          </p:stCondLst>
+                                        </p:cTn>
+                                        <p:tgtEl>
+                                          <p:spTgt spid="6">
+                                            <p:txEl>
+                                              <p:pRg st="1" end="1"/>
+                                            </p:txEl>
+                                          </p:spTgt>
+                                        </p:tgtEl>
+                                        <p:attrNameLst>
+                                          <p:attrName>style.visibility</p:attrName>
+                                        </p:attrNameLst>
+                                      </p:cBhvr>
+                                      <p:to>
+                                        <p:strVal val="visible"/>
+                                      </p:to>
+                                    </p:set>
+                                    <p:anim calcmode="lin" valueType="num">
+                                      <p:cBhvr additive="base">
+                                        <p:cTn id="37" dur="500" fill="hold"/>
+                                        <p:tgtEl>
+                                          <p:spTgt spid="6">
+                                            <p:txEl>
+                                              <p:pRg st="1" end="1"/>
+                                            </p:txEl>
+                                          </p:spTgt>
+                                        </p:tgtEl>
+                                        <p:attrNameLst>
+                                          <p:attrName>ppt_x</p:attrName>
+                                        </p:attrNameLst>
+                                      </p:cBhvr>
+                                      <p:tavLst>
+                                        <p:tav tm="0">
+                                          <p:val>
+                                            <p:strVal val="#ppt_x"/>
+                                          </p:val>
+                                        </p:tav>
+                                        <p:tav tm="100000">
+                                          <p:val>
+                                            <p:strVal val="#ppt_x"/>
+                                          </p:val>
+                                        </p:tav>
+                                      </p:tavLst>
+                                    </p:anim>
+                                    <p:anim calcmode="lin" valueType="num">
+                                      <p:cBhvr additive="base">
+                                        <p:cTn id="38" dur="500" fill="hold"/>
+                                        <p:tgtEl>
+                                          <p:spTgt spid="6">
+                                            <p:txEl>
+                                              <p:pRg st="1" end="1"/>
+                                            </p:txEl>
+                                          </p:spTgt>
+                                        </p:tgtEl>
+                                        <p:attrNameLst>
+                                          <p:attrName>ppt_y</p:attrName>
+                                        </p:attrNameLst>
+                                      </p:cBhvr>
+                                      <p:tavLst>
+                                        <p:tav tm="0">
+                                          <p:val>
+                                            <p:strVal val="1+#ppt_h/2"/>
+                                          </p:val>
+                                        </p:tav>
+                                        <p:tav tm="100000">
+                                          <p:val>
+                                            <p:strVal val="#ppt_y"/>
+                                          </p:val>
+                                        </p:tav>
+                                      </p:tavLst>
+                                    </p:anim>
+                                  </p:childTnLst>
+                                </p:cTn>
+                              </p:par>
+                            </p:childTnLst>
+                          </p:cTn>
+                        </p:par>
+                      </p:childTnLst>
+                    </p:cTn>
+                  </p:par>
+                </p:childTnLst>
+              </p:cTn>
+              <p:prevCondLst>
+                <p:cond evt="onPrev" delay="0">
+                  <p:tgtEl>
+                    <p:sldTgt/>
+                  </p:tgtEl>
+                </p:cond>
+              </p:prevCondLst>
+              <p:nextCondLst>
+                <p:cond evt="onNext" delay="0">
+                  <p:tgtEl>
+                    <p:sldTgt/>
+                  </p:tgtEl>
+                </p:cond>
+              </p:nextCondLst>
+            </p:seq>
+          </p:childTnLst>
+        </p:cTn>
+      </p:par>
+    </p:tnLst>
+    <p:bldLst>
+      <p:bldP spid="4" grpId="0" animBg="1"/>
+      <p:bldP spid="5" grpId="0" animBg="1"/>
+      <p:bldP spid="9" grpId="0" animBg="1"/>
+      <p:bldP spid="13" grpId="0"/>
+    </p:bldLst>
+  </p:timing>
+</p:sld>
+</file>
+
+<file path=ppt/slides/slide21.xml><?xml version="1.0" encoding="utf-8"?>
+<p:sld xmlns:a="http://schemas.openxmlformats.org/drawingml/2006/main" xmlns:r="http://schemas.openxmlformats.org/officeDocument/2006/relationships" xmlns:p="http://schemas.openxmlformats.org/presentationml/2006/main">
+  <p:cSld>
+    <p:spTree>
+      <p:nvGrpSpPr>
+        <p:cNvPr id="1" name=""/>
+        <p:cNvGrpSpPr/>
+        <p:nvPr/>
+      </p:nvGrpSpPr>
+      <p:grpSpPr>
+        <a:xfrm>
+          <a:off x="0" y="0"/>
+          <a:ext cx="0" cy="0"/>
+          <a:chOff x="0" y="0"/>
+          <a:chExt cx="0" cy="0"/>
+        </a:xfrm>
+      </p:grpSpPr>
+      <p:pic>
+        <p:nvPicPr>
+          <p:cNvPr id="42" name="Picture 41" descr="Text&#10;&#10;Description automatically generated">
+            <a:extLst>
+              <a:ext uri="{FF2B5EF4-FFF2-40B4-BE49-F238E27FC236}">
+                <a16:creationId xmlns:a16="http://schemas.microsoft.com/office/drawing/2014/main" id="{2C6DED11-E24C-1747-9B8B-24AF63DEAB2F}"/>
+              </a:ext>
+            </a:extLst>
+          </p:cNvPr>
+          <p:cNvPicPr>
+            <a:picLocks noChangeAspect="1"/>
+          </p:cNvPicPr>
+          <p:nvPr/>
+        </p:nvPicPr>
+        <p:blipFill>
+          <a:blip r:embed="rId2"/>
+          <a:stretch>
+            <a:fillRect/>
+          </a:stretch>
+        </p:blipFill>
+        <p:spPr>
+          <a:xfrm>
+            <a:off x="494726" y="599364"/>
+            <a:ext cx="3285707" cy="2497138"/>
+          </a:xfrm>
+          <a:prstGeom prst="rect">
+            <a:avLst/>
+          </a:prstGeom>
+          <a:noFill/>
+        </p:spPr>
+      </p:pic>
+      <p:sp>
+        <p:nvSpPr>
+          <p:cNvPr id="16385" name="Slide Number Placeholder 2"/>
+          <p:cNvSpPr>
+            <a:spLocks noGrp="1"/>
+          </p:cNvSpPr>
+          <p:nvPr>
+            <p:ph type="sldNum" sz="quarter" idx="12"/>
+          </p:nvPr>
+        </p:nvSpPr>
+        <p:spPr>
+          <a:extLst>
+            <a:ext uri="{909E8E84-426E-40dd-AFC4-6F175D3DCCD1}">
+              <a14:hiddenFill xmlns="" xmlns:a14="http://schemas.microsoft.com/office/drawing/2010/main">
+                <a:solidFill>
+                  <a:srgbClr val="FFFFFF"/>
+                </a:solidFill>
+              </a14:hiddenFill>
+            </a:ext>
+            <a:ext uri="{91240B29-F687-4f45-9708-019B960494DF}">
+              <a14:hiddenLine xmlns="" xmlns:a14="http://schemas.microsoft.com/office/drawing/2010/main" w="9525">
+                <a:solidFill>
+                  <a:srgbClr val="000000"/>
+                </a:solidFill>
+                <a:miter lim="800000"/>
+                <a:headEnd/>
+                <a:tailEnd/>
+              </a14:hiddenLine>
+            </a:ext>
+          </a:extLst>
+        </p:spPr>
+        <p:txBody>
+          <a:bodyPr wrap="square" anchor="t">
+            <a:normAutofit/>
+          </a:bodyPr>
+          <a:lstStyle>
+            <a:lvl1pPr>
+              <a:defRPr sz="1412">
+                <a:solidFill>
+                  <a:schemeClr val="tx1"/>
+                </a:solidFill>
+                <a:latin typeface="Tahoma" charset="0"/>
+                <a:ea typeface="ＭＳ Ｐゴシック" charset="0"/>
+                <a:cs typeface="ＭＳ Ｐゴシック" charset="0"/>
+              </a:defRPr>
+            </a:lvl1pPr>
+            <a:lvl2pPr marL="374595" indent="-144075">
+              <a:defRPr sz="1412">
+                <a:solidFill>
+                  <a:schemeClr val="tx1"/>
+                </a:solidFill>
+                <a:latin typeface="Tahoma" charset="0"/>
+                <a:ea typeface="ＭＳ Ｐゴシック" charset="0"/>
+              </a:defRPr>
+            </a:lvl2pPr>
+            <a:lvl3pPr marL="576301" indent="-115260">
+              <a:defRPr sz="1412">
+                <a:solidFill>
+                  <a:schemeClr val="tx1"/>
+                </a:solidFill>
+                <a:latin typeface="Tahoma" charset="0"/>
+                <a:ea typeface="ＭＳ Ｐゴシック" charset="0"/>
+              </a:defRPr>
+            </a:lvl3pPr>
+            <a:lvl4pPr marL="806821" indent="-115260">
+              <a:defRPr sz="1412">
+                <a:solidFill>
+                  <a:schemeClr val="tx1"/>
+                </a:solidFill>
+                <a:latin typeface="Tahoma" charset="0"/>
+                <a:ea typeface="ＭＳ Ｐゴシック" charset="0"/>
+              </a:defRPr>
+            </a:lvl4pPr>
+            <a:lvl5pPr marL="1037341" indent="-115260">
+              <a:defRPr sz="1412">
+                <a:solidFill>
+                  <a:schemeClr val="tx1"/>
+                </a:solidFill>
+                <a:latin typeface="Tahoma" charset="0"/>
+                <a:ea typeface="ＭＳ Ｐゴシック" charset="0"/>
+              </a:defRPr>
+            </a:lvl5pPr>
+            <a:lvl6pPr marL="1267861" indent="-115260" eaLnBrk="0" fontAlgn="base" hangingPunct="0">
+              <a:spcBef>
+                <a:spcPct val="0"/>
+              </a:spcBef>
+              <a:spcAft>
+                <a:spcPct val="0"/>
+              </a:spcAft>
+              <a:defRPr sz="1412">
+                <a:solidFill>
+                  <a:schemeClr val="tx1"/>
+                </a:solidFill>
+                <a:latin typeface="Tahoma" charset="0"/>
+                <a:ea typeface="ＭＳ Ｐゴシック" charset="0"/>
+              </a:defRPr>
+            </a:lvl6pPr>
+            <a:lvl7pPr marL="1498382" indent="-115260" eaLnBrk="0" fontAlgn="base" hangingPunct="0">
+              <a:spcBef>
+                <a:spcPct val="0"/>
+              </a:spcBef>
+              <a:spcAft>
+                <a:spcPct val="0"/>
+              </a:spcAft>
+              <a:defRPr sz="1412">
+                <a:solidFill>
+                  <a:schemeClr val="tx1"/>
+                </a:solidFill>
+                <a:latin typeface="Tahoma" charset="0"/>
+                <a:ea typeface="ＭＳ Ｐゴシック" charset="0"/>
+              </a:defRPr>
+            </a:lvl7pPr>
+            <a:lvl8pPr marL="1728902" indent="-115260" eaLnBrk="0" fontAlgn="base" hangingPunct="0">
+              <a:spcBef>
+                <a:spcPct val="0"/>
+              </a:spcBef>
+              <a:spcAft>
+                <a:spcPct val="0"/>
+              </a:spcAft>
+              <a:defRPr sz="1412">
+                <a:solidFill>
+                  <a:schemeClr val="tx1"/>
+                </a:solidFill>
+                <a:latin typeface="Tahoma" charset="0"/>
+                <a:ea typeface="ＭＳ Ｐゴシック" charset="0"/>
+              </a:defRPr>
+            </a:lvl8pPr>
+            <a:lvl9pPr marL="1959422" indent="-115260" eaLnBrk="0" fontAlgn="base" hangingPunct="0">
+              <a:spcBef>
+                <a:spcPct val="0"/>
+              </a:spcBef>
+              <a:spcAft>
+                <a:spcPct val="0"/>
+              </a:spcAft>
+              <a:defRPr sz="1412">
+                <a:solidFill>
+                  <a:schemeClr val="tx1"/>
+                </a:solidFill>
+                <a:latin typeface="Tahoma" charset="0"/>
+                <a:ea typeface="ＭＳ Ｐゴシック" charset="0"/>
+              </a:defRPr>
+            </a:lvl9pPr>
+          </a:lstStyle>
+          <a:p>
+            <a:pPr>
+              <a:spcAft>
+                <a:spcPts val="303"/>
+              </a:spcAft>
+            </a:pPr>
+            <a:fld id="{CC73A6B6-49ED-C641-8D95-0A84FA800C15}" type="slidenum">
+              <a:rPr lang="en-US" sz="706"/>
+              <a:pPr>
+                <a:spcAft>
+                  <a:spcPts val="303"/>
+                </a:spcAft>
+              </a:pPr>
+              <a:t>21</a:t>
+            </a:fld>
+            <a:endParaRPr lang="en-US" sz="706" dirty="0"/>
+          </a:p>
+        </p:txBody>
+      </p:sp>
+      <p:sp>
+        <p:nvSpPr>
+          <p:cNvPr id="3" name="TextBox 2">
+            <a:extLst>
+              <a:ext uri="{FF2B5EF4-FFF2-40B4-BE49-F238E27FC236}">
+                <a16:creationId xmlns:a16="http://schemas.microsoft.com/office/drawing/2014/main" id="{978BE327-ECF9-8AAA-101C-567717DCFCF3}"/>
+              </a:ext>
+            </a:extLst>
+          </p:cNvPr>
+          <p:cNvSpPr txBox="1"/>
+          <p:nvPr/>
+        </p:nvSpPr>
+        <p:spPr>
+          <a:xfrm>
+            <a:off x="3273953" y="236000"/>
+            <a:ext cx="184731" cy="232051"/>
+          </a:xfrm>
+          <a:prstGeom prst="rect">
+            <a:avLst/>
+          </a:prstGeom>
+          <a:noFill/>
+        </p:spPr>
+        <p:txBody>
+          <a:bodyPr wrap="none" rtlCol="0">
+            <a:spAutoFit/>
+          </a:bodyPr>
+          <a:lstStyle/>
+          <a:p>
+            <a:endParaRPr lang="en-US" sz="908" dirty="0"/>
+          </a:p>
+        </p:txBody>
+      </p:sp>
+    </p:spTree>
+    <p:extLst>
+      <p:ext uri="{BB962C8B-B14F-4D97-AF65-F5344CB8AC3E}">
+        <p14:creationId xmlns:p14="http://schemas.microsoft.com/office/powerpoint/2010/main" val="1205145016"/>
+      </p:ext>
+    </p:extLst>
+  </p:cSld>
+  <p:clrMapOvr>
+    <a:masterClrMapping/>
+  </p:clrMapOvr>
+</p:sld>
+</file>
+
 <file path=ppt/slides/slide3.xml><?xml version="1.0" encoding="utf-8"?>
 <p:sld xmlns:a="http://schemas.openxmlformats.org/drawingml/2006/main" xmlns:r="http://schemas.openxmlformats.org/officeDocument/2006/relationships" xmlns:p="http://schemas.openxmlformats.org/presentationml/2006/main">
   <p:cSld>
@@ -20892,14 +24793,14 @@
           </a:xfrm>
           <a:extLst>
             <a:ext uri="{909E8E84-426E-40dd-AFC4-6F175D3DCCD1}">
-              <a14:hiddenFill xmlns:a14="http://schemas.microsoft.com/office/drawing/2010/main" xmlns="">
+              <a14:hiddenFill xmlns="" xmlns:a14="http://schemas.microsoft.com/office/drawing/2010/main">
                 <a:solidFill>
                   <a:srgbClr val="FFFFFF"/>
                 </a:solidFill>
               </a14:hiddenFill>
             </a:ext>
             <a:ext uri="{91240B29-F687-4f45-9708-019B960494DF}">
-              <a14:hiddenLine xmlns:a14="http://schemas.microsoft.com/office/drawing/2010/main" xmlns="" w="9525">
+              <a14:hiddenLine xmlns="" xmlns:a14="http://schemas.microsoft.com/office/drawing/2010/main" w="9525">
                 <a:solidFill>
                   <a:srgbClr val="000000"/>
                 </a:solidFill>
@@ -22174,14 +26075,14 @@
           </a:xfrm>
           <a:extLst>
             <a:ext uri="{909E8E84-426E-40dd-AFC4-6F175D3DCCD1}">
-              <a14:hiddenFill xmlns:a14="http://schemas.microsoft.com/office/drawing/2010/main" xmlns="">
+              <a14:hiddenFill xmlns="" xmlns:a14="http://schemas.microsoft.com/office/drawing/2010/main">
                 <a:solidFill>
                   <a:srgbClr val="FFFFFF"/>
                 </a:solidFill>
               </a14:hiddenFill>
             </a:ext>
             <a:ext uri="{91240B29-F687-4f45-9708-019B960494DF}">
-              <a14:hiddenLine xmlns:a14="http://schemas.microsoft.com/office/drawing/2010/main" xmlns="" w="9525">
+              <a14:hiddenLine xmlns="" xmlns:a14="http://schemas.microsoft.com/office/drawing/2010/main" w="9525">
                 <a:solidFill>
                   <a:srgbClr val="000000"/>
                 </a:solidFill>
@@ -23774,14 +27675,14 @@
           </a:xfrm>
           <a:extLst>
             <a:ext uri="{909E8E84-426E-40dd-AFC4-6F175D3DCCD1}">
-              <a14:hiddenFill xmlns:a14="http://schemas.microsoft.com/office/drawing/2010/main" xmlns="">
+              <a14:hiddenFill xmlns="" xmlns:a14="http://schemas.microsoft.com/office/drawing/2010/main">
                 <a:solidFill>
                   <a:srgbClr val="FFFFFF"/>
                 </a:solidFill>
               </a14:hiddenFill>
             </a:ext>
             <a:ext uri="{91240B29-F687-4f45-9708-019B960494DF}">
-              <a14:hiddenLine xmlns:a14="http://schemas.microsoft.com/office/drawing/2010/main" xmlns="" w="9525">
+              <a14:hiddenLine xmlns="" xmlns:a14="http://schemas.microsoft.com/office/drawing/2010/main" w="9525">
                 <a:solidFill>
                   <a:srgbClr val="000000"/>
                 </a:solidFill>
@@ -24489,14 +28390,14 @@
           </a:xfrm>
           <a:extLst>
             <a:ext uri="{909E8E84-426E-40dd-AFC4-6F175D3DCCD1}">
-              <a14:hiddenFill xmlns:a14="http://schemas.microsoft.com/office/drawing/2010/main" xmlns="">
+              <a14:hiddenFill xmlns="" xmlns:a14="http://schemas.microsoft.com/office/drawing/2010/main">
                 <a:solidFill>
                   <a:srgbClr val="FFFFFF"/>
                 </a:solidFill>
               </a14:hiddenFill>
             </a:ext>
             <a:ext uri="{91240B29-F687-4f45-9708-019B960494DF}">
-              <a14:hiddenLine xmlns:a14="http://schemas.microsoft.com/office/drawing/2010/main" xmlns="" w="9525">
+              <a14:hiddenLine xmlns="" xmlns:a14="http://schemas.microsoft.com/office/drawing/2010/main" w="9525">
                 <a:solidFill>
                   <a:srgbClr val="000000"/>
                 </a:solidFill>
@@ -25614,14 +29515,14 @@
           </a:xfrm>
           <a:extLst>
             <a:ext uri="{909E8E84-426E-40dd-AFC4-6F175D3DCCD1}">
-              <a14:hiddenFill xmlns:a14="http://schemas.microsoft.com/office/drawing/2010/main" xmlns="">
+              <a14:hiddenFill xmlns="" xmlns:a14="http://schemas.microsoft.com/office/drawing/2010/main">
                 <a:solidFill>
                   <a:srgbClr val="FFFFFF"/>
                 </a:solidFill>
               </a14:hiddenFill>
             </a:ext>
             <a:ext uri="{91240B29-F687-4f45-9708-019B960494DF}">
-              <a14:hiddenLine xmlns:a14="http://schemas.microsoft.com/office/drawing/2010/main" xmlns="" w="9525">
+              <a14:hiddenLine xmlns="" xmlns:a14="http://schemas.microsoft.com/office/drawing/2010/main" w="9525">
                 <a:solidFill>
                   <a:srgbClr val="000000"/>
                 </a:solidFill>
@@ -27647,14 +31548,14 @@
           </a:xfrm>
           <a:extLst>
             <a:ext uri="{909E8E84-426E-40dd-AFC4-6F175D3DCCD1}">
-              <a14:hiddenFill xmlns:a14="http://schemas.microsoft.com/office/drawing/2010/main" xmlns="">
+              <a14:hiddenFill xmlns="" xmlns:a14="http://schemas.microsoft.com/office/drawing/2010/main">
                 <a:solidFill>
                   <a:srgbClr val="FFFFFF"/>
                 </a:solidFill>
               </a14:hiddenFill>
             </a:ext>
             <a:ext uri="{91240B29-F687-4f45-9708-019B960494DF}">
-              <a14:hiddenLine xmlns:a14="http://schemas.microsoft.com/office/drawing/2010/main" xmlns="" w="9525">
+              <a14:hiddenLine xmlns="" xmlns:a14="http://schemas.microsoft.com/office/drawing/2010/main" w="9525">
                 <a:solidFill>
                   <a:srgbClr val="000000"/>
                 </a:solidFill>
@@ -30128,14 +34029,14 @@
           </a:xfrm>
           <a:extLst>
             <a:ext uri="{909E8E84-426E-40dd-AFC4-6F175D3DCCD1}">
-              <a14:hiddenFill xmlns:a14="http://schemas.microsoft.com/office/drawing/2010/main" xmlns="">
+              <a14:hiddenFill xmlns="" xmlns:a14="http://schemas.microsoft.com/office/drawing/2010/main">
                 <a:solidFill>
                   <a:srgbClr val="FFFFFF"/>
                 </a:solidFill>
               </a14:hiddenFill>
             </a:ext>
             <a:ext uri="{91240B29-F687-4f45-9708-019B960494DF}">
-              <a14:hiddenLine xmlns:a14="http://schemas.microsoft.com/office/drawing/2010/main" xmlns="" w="9525">
+              <a14:hiddenLine xmlns="" xmlns:a14="http://schemas.microsoft.com/office/drawing/2010/main" w="9525">
                 <a:solidFill>
                   <a:srgbClr val="000000"/>
                 </a:solidFill>
